--- a/.lessons/51 Frontend Template Setup And Mastering/3 Frontend Setup- Master login, register page/1.pptx
+++ b/.lessons/51 Frontend Template Setup And Mastering/3 Frontend Setup- Master login, register page/1.pptx
@@ -6,8 +6,19 @@
   </p:sldMasterIdLst>
   <p:sldIdLst>
     <p:sldId id="413" r:id="rId2"/>
-    <p:sldId id="414" r:id="rId3"/>
-    <p:sldId id="400" r:id="rId4"/>
+    <p:sldId id="415" r:id="rId3"/>
+    <p:sldId id="416" r:id="rId4"/>
+    <p:sldId id="418" r:id="rId5"/>
+    <p:sldId id="419" r:id="rId6"/>
+    <p:sldId id="417" r:id="rId7"/>
+    <p:sldId id="414" r:id="rId8"/>
+    <p:sldId id="420" r:id="rId9"/>
+    <p:sldId id="421" r:id="rId10"/>
+    <p:sldId id="422" r:id="rId11"/>
+    <p:sldId id="424" r:id="rId12"/>
+    <p:sldId id="425" r:id="rId13"/>
+    <p:sldId id="423" r:id="rId14"/>
+    <p:sldId id="400" r:id="rId15"/>
   </p:sldIdLst>
   <p:sldSz cx="12192000" cy="6858000"/>
   <p:notesSz cx="6858000" cy="9144000"/>
@@ -261,7 +272,7 @@
           <a:p>
             <a:fld id="{3E102D2E-813C-461C-9963-687A650C48C0}" type="datetimeFigureOut">
               <a:rPr lang="en-US" smtClean="0"/>
-              <a:t>6/26/2025</a:t>
+              <a:t>7/29/2025</a:t>
             </a:fld>
             <a:endParaRPr lang="en-US"/>
           </a:p>
@@ -459,7 +470,7 @@
           <a:p>
             <a:fld id="{3E102D2E-813C-461C-9963-687A650C48C0}" type="datetimeFigureOut">
               <a:rPr lang="en-US" smtClean="0"/>
-              <a:t>6/26/2025</a:t>
+              <a:t>7/29/2025</a:t>
             </a:fld>
             <a:endParaRPr lang="en-US"/>
           </a:p>
@@ -667,7 +678,7 @@
           <a:p>
             <a:fld id="{3E102D2E-813C-461C-9963-687A650C48C0}" type="datetimeFigureOut">
               <a:rPr lang="en-US" smtClean="0"/>
-              <a:t>6/26/2025</a:t>
+              <a:t>7/29/2025</a:t>
             </a:fld>
             <a:endParaRPr lang="en-US"/>
           </a:p>
@@ -865,7 +876,7 @@
           <a:p>
             <a:fld id="{3E102D2E-813C-461C-9963-687A650C48C0}" type="datetimeFigureOut">
               <a:rPr lang="en-US" smtClean="0"/>
-              <a:t>6/26/2025</a:t>
+              <a:t>7/29/2025</a:t>
             </a:fld>
             <a:endParaRPr lang="en-US"/>
           </a:p>
@@ -1140,7 +1151,7 @@
           <a:p>
             <a:fld id="{3E102D2E-813C-461C-9963-687A650C48C0}" type="datetimeFigureOut">
               <a:rPr lang="en-US" smtClean="0"/>
-              <a:t>6/26/2025</a:t>
+              <a:t>7/29/2025</a:t>
             </a:fld>
             <a:endParaRPr lang="en-US"/>
           </a:p>
@@ -1405,7 +1416,7 @@
           <a:p>
             <a:fld id="{3E102D2E-813C-461C-9963-687A650C48C0}" type="datetimeFigureOut">
               <a:rPr lang="en-US" smtClean="0"/>
-              <a:t>6/26/2025</a:t>
+              <a:t>7/29/2025</a:t>
             </a:fld>
             <a:endParaRPr lang="en-US"/>
           </a:p>
@@ -1817,7 +1828,7 @@
           <a:p>
             <a:fld id="{3E102D2E-813C-461C-9963-687A650C48C0}" type="datetimeFigureOut">
               <a:rPr lang="en-US" smtClean="0"/>
-              <a:t>6/26/2025</a:t>
+              <a:t>7/29/2025</a:t>
             </a:fld>
             <a:endParaRPr lang="en-US"/>
           </a:p>
@@ -1958,7 +1969,7 @@
           <a:p>
             <a:fld id="{3E102D2E-813C-461C-9963-687A650C48C0}" type="datetimeFigureOut">
               <a:rPr lang="en-US" smtClean="0"/>
-              <a:t>6/26/2025</a:t>
+              <a:t>7/29/2025</a:t>
             </a:fld>
             <a:endParaRPr lang="en-US"/>
           </a:p>
@@ -2071,7 +2082,7 @@
           <a:p>
             <a:fld id="{3E102D2E-813C-461C-9963-687A650C48C0}" type="datetimeFigureOut">
               <a:rPr lang="en-US" smtClean="0"/>
-              <a:t>6/26/2025</a:t>
+              <a:t>7/29/2025</a:t>
             </a:fld>
             <a:endParaRPr lang="en-US"/>
           </a:p>
@@ -2382,7 +2393,7 @@
           <a:p>
             <a:fld id="{3E102D2E-813C-461C-9963-687A650C48C0}" type="datetimeFigureOut">
               <a:rPr lang="en-US" smtClean="0"/>
-              <a:t>6/26/2025</a:t>
+              <a:t>7/29/2025</a:t>
             </a:fld>
             <a:endParaRPr lang="en-US"/>
           </a:p>
@@ -2670,7 +2681,7 @@
           <a:p>
             <a:fld id="{3E102D2E-813C-461C-9963-687A650C48C0}" type="datetimeFigureOut">
               <a:rPr lang="en-US" smtClean="0"/>
-              <a:t>6/26/2025</a:t>
+              <a:t>7/29/2025</a:t>
             </a:fld>
             <a:endParaRPr lang="en-US"/>
           </a:p>
@@ -2911,7 +2922,7 @@
           <a:p>
             <a:fld id="{3E102D2E-813C-461C-9963-687A650C48C0}" type="datetimeFigureOut">
               <a:rPr lang="en-US" smtClean="0"/>
-              <a:t>6/26/2025</a:t>
+              <a:t>7/29/2025</a:t>
             </a:fld>
             <a:endParaRPr lang="en-US"/>
           </a:p>
@@ -3349,7 +3360,7 @@
         <p:spPr>
           <a:xfrm>
             <a:off x="217714" y="255046"/>
-            <a:ext cx="11756571" cy="355354"/>
+            <a:ext cx="11756571" cy="1255600"/>
           </a:xfrm>
           <a:prstGeom prst="rect">
             <a:avLst/>
@@ -3369,21 +3380,133 @@
               <a:buNone/>
             </a:pPr>
             <a:r>
-              <a:rPr kumimoji="0" lang="en-US" altLang="en-US" sz="1300" b="0" i="0" u="none" strike="noStrike" cap="none" normalizeH="0" baseline="0">
-                <a:ln>
-                  <a:noFill/>
-                </a:ln>
+              <a:rPr lang="az-Latn-AZ" altLang="en-US" sz="1300">
+                <a:latin typeface="Arial" panose="020B0604020202020204" pitchFamily="34" charset="0"/>
+              </a:rPr>
+              <a:t>Öz </a:t>
+            </a:r>
+            <a:r>
+              <a:rPr lang="az-Latn-AZ" altLang="en-US" sz="1300" b="1">
+                <a:latin typeface="Arial" panose="020B0604020202020204" pitchFamily="34" charset="0"/>
+              </a:rPr>
+              <a:t>LOGİN</a:t>
+            </a:r>
+            <a:r>
+              <a:rPr lang="az-Latn-AZ" altLang="en-US" sz="1300">
+                <a:latin typeface="Arial" panose="020B0604020202020204" pitchFamily="34" charset="0"/>
+              </a:rPr>
+              <a:t> səhifəmizi yaradacağıq. </a:t>
+            </a:r>
+          </a:p>
+          <a:p>
+            <a:pPr>
+              <a:lnSpc>
+                <a:spcPct val="150000"/>
+              </a:lnSpc>
+              <a:buNone/>
+            </a:pPr>
+            <a:endParaRPr lang="az-Latn-AZ" altLang="en-US" sz="1300">
+              <a:latin typeface="Arial" panose="020B0604020202020204" pitchFamily="34" charset="0"/>
+            </a:endParaRPr>
+          </a:p>
+          <a:p>
+            <a:pPr>
+              <a:lnSpc>
+                <a:spcPct val="150000"/>
+              </a:lnSpc>
+              <a:buNone/>
+            </a:pPr>
+            <a:r>
+              <a:rPr lang="az-Latn-AZ" altLang="en-US" sz="1300">
+                <a:latin typeface="Arial" panose="020B0604020202020204" pitchFamily="34" charset="0"/>
+              </a:rPr>
+              <a:t>Bunun üçün ilk öncə, birdən lazım olar deyə </a:t>
+            </a:r>
+            <a:r>
+              <a:rPr lang="az-Latn-AZ" altLang="en-US" sz="1300" b="1">
+                <a:latin typeface="Arial" panose="020B0604020202020204" pitchFamily="34" charset="0"/>
+              </a:rPr>
+              <a:t>mövcud login səhifəsinin kopyasını</a:t>
+            </a:r>
+            <a:r>
+              <a:rPr lang="az-Latn-AZ" altLang="en-US" sz="1300">
+                <a:latin typeface="Arial" panose="020B0604020202020204" pitchFamily="34" charset="0"/>
+              </a:rPr>
+              <a:t> yaratdıqdan sonra, `</a:t>
+            </a:r>
+            <a:r>
+              <a:rPr lang="az-Latn-AZ" altLang="en-US" sz="1300" b="1">
+                <a:latin typeface="Arial" panose="020B0604020202020204" pitchFamily="34" charset="0"/>
+              </a:rPr>
+              <a:t>LOGİN.HTML</a:t>
+            </a:r>
+            <a:r>
+              <a:rPr lang="az-Latn-AZ" altLang="en-US" sz="1300">
+                <a:latin typeface="Arial" panose="020B0604020202020204" pitchFamily="34" charset="0"/>
+              </a:rPr>
+              <a:t>` template -indəki </a:t>
+            </a:r>
+            <a:r>
+              <a:rPr lang="az-Latn-AZ" altLang="en-US" sz="1300" b="1">
+                <a:latin typeface="Arial" panose="020B0604020202020204" pitchFamily="34" charset="0"/>
+              </a:rPr>
+              <a:t>login elementlərini</a:t>
+            </a:r>
+            <a:r>
+              <a:rPr lang="az-Latn-AZ" altLang="en-US" sz="1300">
+                <a:latin typeface="Arial" panose="020B0604020202020204" pitchFamily="34" charset="0"/>
+              </a:rPr>
+              <a:t>, `</a:t>
+            </a:r>
+            <a:r>
+              <a:rPr lang="en-US" altLang="en-US" sz="1300" b="1">
                 <a:solidFill>
-                  <a:schemeClr val="tx1"/>
+                  <a:srgbClr val="00B050"/>
                 </a:solidFill>
-                <a:effectLst/>
-                <a:latin typeface="Arial" panose="020B0604020202020204" pitchFamily="34" charset="0"/>
-              </a:rPr>
-              <a:t>.</a:t>
-            </a:r>
-          </a:p>
-        </p:txBody>
-      </p:sp>
+                <a:latin typeface="Arial" panose="020B0604020202020204" pitchFamily="34" charset="0"/>
+              </a:rPr>
+              <a:t>resources\views\auth\login.blade.php</a:t>
+            </a:r>
+            <a:r>
+              <a:rPr lang="az-Latn-AZ" altLang="en-US" sz="1300">
+                <a:latin typeface="Arial" panose="020B0604020202020204" pitchFamily="34" charset="0"/>
+              </a:rPr>
+              <a:t>` faylına köçürürük. </a:t>
+            </a:r>
+          </a:p>
+        </p:txBody>
+      </p:sp>
+      <p:pic>
+        <p:nvPicPr>
+          <p:cNvPr id="4" name="Picture 3">
+            <a:extLst>
+              <a:ext uri="{FF2B5EF4-FFF2-40B4-BE49-F238E27FC236}">
+                <a16:creationId xmlns:a16="http://schemas.microsoft.com/office/drawing/2014/main" id="{167B7631-03E7-035C-62A8-C6C27BF1733A}"/>
+              </a:ext>
+            </a:extLst>
+          </p:cNvPr>
+          <p:cNvPicPr>
+            <a:picLocks noChangeAspect="1"/>
+          </p:cNvPicPr>
+          <p:nvPr/>
+        </p:nvPicPr>
+        <p:blipFill>
+          <a:blip r:embed="rId2"/>
+          <a:srcRect b="1088"/>
+          <a:stretch>
+            <a:fillRect/>
+          </a:stretch>
+        </p:blipFill>
+        <p:spPr>
+          <a:xfrm>
+            <a:off x="3219060" y="1675050"/>
+            <a:ext cx="8972939" cy="5182950"/>
+          </a:xfrm>
+          <a:prstGeom prst="rect">
+            <a:avLst/>
+          </a:prstGeom>
+        </p:spPr>
+      </p:pic>
     </p:spTree>
     <p:extLst>
       <p:ext uri="{BB962C8B-B14F-4D97-AF65-F5344CB8AC3E}">
@@ -3397,7 +3520,1598 @@
 </p:sld>
 </file>
 
+<file path=ppt/slides/slide10.xml><?xml version="1.0" encoding="utf-8"?>
+<p:sld xmlns:a="http://schemas.openxmlformats.org/drawingml/2006/main" xmlns:r="http://schemas.openxmlformats.org/officeDocument/2006/relationships" xmlns:p="http://schemas.openxmlformats.org/presentationml/2006/main">
+  <p:cSld>
+    <p:spTree>
+      <p:nvGrpSpPr>
+        <p:cNvPr id="1" name="">
+          <a:extLst>
+            <a:ext uri="{FF2B5EF4-FFF2-40B4-BE49-F238E27FC236}">
+              <a16:creationId xmlns:a16="http://schemas.microsoft.com/office/drawing/2014/main" id="{F9E4E501-939F-59EA-875A-83EED9467AC4}"/>
+            </a:ext>
+          </a:extLst>
+        </p:cNvPr>
+        <p:cNvGrpSpPr/>
+        <p:nvPr/>
+      </p:nvGrpSpPr>
+      <p:grpSpPr>
+        <a:xfrm>
+          <a:off x="0" y="0"/>
+          <a:ext cx="0" cy="0"/>
+          <a:chOff x="0" y="0"/>
+          <a:chExt cx="0" cy="0"/>
+        </a:xfrm>
+      </p:grpSpPr>
+      <p:sp>
+        <p:nvSpPr>
+          <p:cNvPr id="3" name="TextBox 2">
+            <a:extLst>
+              <a:ext uri="{FF2B5EF4-FFF2-40B4-BE49-F238E27FC236}">
+                <a16:creationId xmlns:a16="http://schemas.microsoft.com/office/drawing/2014/main" id="{1DDE4B5A-8D48-EBE7-AC52-8E44BEC9B32C}"/>
+              </a:ext>
+            </a:extLst>
+          </p:cNvPr>
+          <p:cNvSpPr txBox="1"/>
+          <p:nvPr/>
+        </p:nvSpPr>
+        <p:spPr>
+          <a:xfrm>
+            <a:off x="0" y="4391323"/>
+            <a:ext cx="12192000" cy="655436"/>
+          </a:xfrm>
+          <a:prstGeom prst="rect">
+            <a:avLst/>
+          </a:prstGeom>
+          <a:noFill/>
+        </p:spPr>
+        <p:txBody>
+          <a:bodyPr wrap="square">
+            <a:spAutoFit/>
+          </a:bodyPr>
+          <a:lstStyle/>
+          <a:p>
+            <a:pPr>
+              <a:lnSpc>
+                <a:spcPct val="150000"/>
+              </a:lnSpc>
+              <a:buNone/>
+            </a:pPr>
+            <a:r>
+              <a:rPr lang="az-Latn-AZ" altLang="en-US" sz="1300">
+                <a:latin typeface="Arial" panose="020B0604020202020204" pitchFamily="34" charset="0"/>
+              </a:rPr>
+              <a:t>Bu da </a:t>
+            </a:r>
+            <a:r>
+              <a:rPr lang="az-Latn-AZ" altLang="en-US" sz="1300" b="1">
+                <a:latin typeface="Arial" panose="020B0604020202020204" pitchFamily="34" charset="0"/>
+              </a:rPr>
+              <a:t>REGİSTER</a:t>
+            </a:r>
+            <a:r>
+              <a:rPr lang="az-Latn-AZ" altLang="en-US" sz="1300">
+                <a:latin typeface="Arial" panose="020B0604020202020204" pitchFamily="34" charset="0"/>
+              </a:rPr>
+              <a:t> bölməsi və `</a:t>
+            </a:r>
+            <a:r>
+              <a:rPr lang="az-Latn-AZ" altLang="en-US" sz="1300" b="1">
+                <a:latin typeface="Arial" panose="020B0604020202020204" pitchFamily="34" charset="0"/>
+              </a:rPr>
+              <a:t>Sign up</a:t>
+            </a:r>
+            <a:r>
+              <a:rPr lang="az-Latn-AZ" altLang="en-US" sz="1300">
+                <a:latin typeface="Arial" panose="020B0604020202020204" pitchFamily="34" charset="0"/>
+              </a:rPr>
+              <a:t>` sözünə kliklədikdə, istifadəçinin qeydiyyatdan keçə bilməsi üçün, `</a:t>
+            </a:r>
+            <a:r>
+              <a:rPr lang="az-Latn-AZ" altLang="en-US" sz="1300" b="1">
+                <a:latin typeface="Arial" panose="020B0604020202020204" pitchFamily="34" charset="0"/>
+              </a:rPr>
+              <a:t>routes\auth.php</a:t>
+            </a:r>
+            <a:r>
+              <a:rPr lang="az-Latn-AZ" altLang="en-US" sz="1300">
+                <a:latin typeface="Arial" panose="020B0604020202020204" pitchFamily="34" charset="0"/>
+              </a:rPr>
+              <a:t>` faylındakı, </a:t>
+            </a:r>
+            <a:r>
+              <a:rPr lang="az-Latn-AZ" altLang="en-US" sz="1300" b="1">
+                <a:solidFill>
+                  <a:srgbClr val="0070C0"/>
+                </a:solidFill>
+                <a:latin typeface="Arial" panose="020B0604020202020204" pitchFamily="34" charset="0"/>
+              </a:rPr>
+              <a:t>Route::post('register’) </a:t>
+            </a:r>
+            <a:r>
+              <a:rPr lang="az-Latn-AZ" altLang="en-US" sz="1300">
+                <a:latin typeface="Arial" panose="020B0604020202020204" pitchFamily="34" charset="0"/>
+              </a:rPr>
+              <a:t>route-una </a:t>
+            </a:r>
+            <a:r>
+              <a:rPr lang="az-Latn-AZ" altLang="en-US" sz="1300" b="1">
+                <a:solidFill>
+                  <a:srgbClr val="FF0000"/>
+                </a:solidFill>
+                <a:latin typeface="Arial" panose="020B0604020202020204" pitchFamily="34" charset="0"/>
+              </a:rPr>
+              <a:t>name() </a:t>
+            </a:r>
+            <a:r>
+              <a:rPr lang="az-Latn-AZ" altLang="en-US" sz="1300">
+                <a:latin typeface="Arial" panose="020B0604020202020204" pitchFamily="34" charset="0"/>
+              </a:rPr>
+              <a:t>metodunu əlavə edərək onu çağırmaq lazımdır.</a:t>
+            </a:r>
+            <a:endParaRPr kumimoji="0" lang="en-US" altLang="en-US" sz="1300" b="0" i="0" u="none" strike="noStrike" cap="none" normalizeH="0" baseline="0">
+              <a:ln>
+                <a:noFill/>
+              </a:ln>
+              <a:solidFill>
+                <a:schemeClr val="tx1"/>
+              </a:solidFill>
+              <a:effectLst/>
+              <a:latin typeface="Arial" panose="020B0604020202020204" pitchFamily="34" charset="0"/>
+            </a:endParaRPr>
+          </a:p>
+        </p:txBody>
+      </p:sp>
+      <p:pic>
+        <p:nvPicPr>
+          <p:cNvPr id="4" name="Picture 3">
+            <a:extLst>
+              <a:ext uri="{FF2B5EF4-FFF2-40B4-BE49-F238E27FC236}">
+                <a16:creationId xmlns:a16="http://schemas.microsoft.com/office/drawing/2014/main" id="{7B409598-A3D9-3DF1-F5FC-AD44C47C2EF9}"/>
+              </a:ext>
+            </a:extLst>
+          </p:cNvPr>
+          <p:cNvPicPr>
+            <a:picLocks noChangeAspect="1"/>
+          </p:cNvPicPr>
+          <p:nvPr/>
+        </p:nvPicPr>
+        <p:blipFill>
+          <a:blip r:embed="rId2"/>
+          <a:stretch>
+            <a:fillRect/>
+          </a:stretch>
+        </p:blipFill>
+        <p:spPr>
+          <a:xfrm>
+            <a:off x="0" y="0"/>
+            <a:ext cx="12192000" cy="4256717"/>
+          </a:xfrm>
+          <a:prstGeom prst="rect">
+            <a:avLst/>
+          </a:prstGeom>
+        </p:spPr>
+      </p:pic>
+      <p:pic>
+        <p:nvPicPr>
+          <p:cNvPr id="6" name="Picture 5">
+            <a:extLst>
+              <a:ext uri="{FF2B5EF4-FFF2-40B4-BE49-F238E27FC236}">
+                <a16:creationId xmlns:a16="http://schemas.microsoft.com/office/drawing/2014/main" id="{12D77454-BF6F-0917-93E3-725A3F3F81C1}"/>
+              </a:ext>
+            </a:extLst>
+          </p:cNvPr>
+          <p:cNvPicPr>
+            <a:picLocks noChangeAspect="1"/>
+          </p:cNvPicPr>
+          <p:nvPr/>
+        </p:nvPicPr>
+        <p:blipFill>
+          <a:blip r:embed="rId3"/>
+          <a:stretch>
+            <a:fillRect/>
+          </a:stretch>
+        </p:blipFill>
+        <p:spPr>
+          <a:xfrm>
+            <a:off x="0" y="5181366"/>
+            <a:ext cx="9602540" cy="1676634"/>
+          </a:xfrm>
+          <a:prstGeom prst="rect">
+            <a:avLst/>
+          </a:prstGeom>
+        </p:spPr>
+      </p:pic>
+    </p:spTree>
+    <p:extLst>
+      <p:ext uri="{BB962C8B-B14F-4D97-AF65-F5344CB8AC3E}">
+        <p14:creationId xmlns:p14="http://schemas.microsoft.com/office/powerpoint/2010/main" val="2271296889"/>
+      </p:ext>
+    </p:extLst>
+  </p:cSld>
+  <p:clrMapOvr>
+    <a:masterClrMapping/>
+  </p:clrMapOvr>
+</p:sld>
+</file>
+
+<file path=ppt/slides/slide11.xml><?xml version="1.0" encoding="utf-8"?>
+<p:sld xmlns:a="http://schemas.openxmlformats.org/drawingml/2006/main" xmlns:r="http://schemas.openxmlformats.org/officeDocument/2006/relationships" xmlns:p="http://schemas.openxmlformats.org/presentationml/2006/main">
+  <p:cSld>
+    <p:spTree>
+      <p:nvGrpSpPr>
+        <p:cNvPr id="1" name="">
+          <a:extLst>
+            <a:ext uri="{FF2B5EF4-FFF2-40B4-BE49-F238E27FC236}">
+              <a16:creationId xmlns:a16="http://schemas.microsoft.com/office/drawing/2014/main" id="{688758A1-6126-7FB3-0E97-9A474F612369}"/>
+            </a:ext>
+          </a:extLst>
+        </p:cNvPr>
+        <p:cNvGrpSpPr/>
+        <p:nvPr/>
+      </p:nvGrpSpPr>
+      <p:grpSpPr>
+        <a:xfrm>
+          <a:off x="0" y="0"/>
+          <a:ext cx="0" cy="0"/>
+          <a:chOff x="0" y="0"/>
+          <a:chExt cx="0" cy="0"/>
+        </a:xfrm>
+      </p:grpSpPr>
+      <p:sp>
+        <p:nvSpPr>
+          <p:cNvPr id="3" name="TextBox 2">
+            <a:extLst>
+              <a:ext uri="{FF2B5EF4-FFF2-40B4-BE49-F238E27FC236}">
+                <a16:creationId xmlns:a16="http://schemas.microsoft.com/office/drawing/2014/main" id="{CAF09A41-4643-C11A-3EEC-E8AB9E03B7F8}"/>
+              </a:ext>
+            </a:extLst>
+          </p:cNvPr>
+          <p:cNvSpPr txBox="1"/>
+          <p:nvPr/>
+        </p:nvSpPr>
+        <p:spPr>
+          <a:xfrm>
+            <a:off x="217715" y="255046"/>
+            <a:ext cx="2954694" cy="1376724"/>
+          </a:xfrm>
+          <a:prstGeom prst="rect">
+            <a:avLst/>
+          </a:prstGeom>
+          <a:noFill/>
+        </p:spPr>
+        <p:txBody>
+          <a:bodyPr wrap="square">
+            <a:spAutoFit/>
+          </a:bodyPr>
+          <a:lstStyle/>
+          <a:p>
+            <a:pPr>
+              <a:lnSpc>
+                <a:spcPct val="150000"/>
+              </a:lnSpc>
+              <a:buNone/>
+            </a:pPr>
+            <a:r>
+              <a:rPr lang="az-Latn-AZ" altLang="en-US" sz="1200">
+                <a:latin typeface="Arial" panose="020B0604020202020204" pitchFamily="34" charset="0"/>
+              </a:rPr>
+              <a:t>Artıq </a:t>
+            </a:r>
+            <a:r>
+              <a:rPr lang="az-Latn-AZ" altLang="en-US" sz="1200" b="1">
+                <a:latin typeface="Arial" panose="020B0604020202020204" pitchFamily="34" charset="0"/>
+              </a:rPr>
+              <a:t>FORM</a:t>
+            </a:r>
+            <a:r>
+              <a:rPr lang="az-Latn-AZ" altLang="en-US" sz="1200">
+                <a:latin typeface="Arial" panose="020B0604020202020204" pitchFamily="34" charset="0"/>
+              </a:rPr>
+              <a:t> elementi </a:t>
+            </a:r>
+            <a:r>
+              <a:rPr lang="az-Latn-AZ" altLang="en-US" sz="1200" b="1">
+                <a:latin typeface="Arial" panose="020B0604020202020204" pitchFamily="34" charset="0"/>
+              </a:rPr>
+              <a:t>submit</a:t>
+            </a:r>
+            <a:r>
+              <a:rPr lang="az-Latn-AZ" altLang="en-US" sz="1200">
+                <a:latin typeface="Arial" panose="020B0604020202020204" pitchFamily="34" charset="0"/>
+              </a:rPr>
+              <a:t> edildikdə bu </a:t>
+            </a:r>
+            <a:r>
+              <a:rPr lang="az-Latn-AZ" altLang="en-US" sz="1200" b="1">
+                <a:latin typeface="Arial" panose="020B0604020202020204" pitchFamily="34" charset="0"/>
+              </a:rPr>
+              <a:t>route</a:t>
+            </a:r>
+            <a:r>
+              <a:rPr lang="az-Latn-AZ" altLang="en-US" sz="1200">
+                <a:latin typeface="Arial" panose="020B0604020202020204" pitchFamily="34" charset="0"/>
+              </a:rPr>
+              <a:t> çağrılacaq: </a:t>
+            </a:r>
+            <a:r>
+              <a:rPr lang="az-Latn-AZ" altLang="en-US" sz="1200" b="1">
+                <a:solidFill>
+                  <a:srgbClr val="FF0000"/>
+                </a:solidFill>
+                <a:latin typeface="Arial" panose="020B0604020202020204" pitchFamily="34" charset="0"/>
+              </a:rPr>
+              <a:t>route('register’)</a:t>
+            </a:r>
+            <a:r>
+              <a:rPr lang="az-Latn-AZ" altLang="en-US" sz="1200">
+                <a:latin typeface="Arial" panose="020B0604020202020204" pitchFamily="34" charset="0"/>
+              </a:rPr>
+              <a:t> </a:t>
+            </a:r>
+          </a:p>
+          <a:p>
+            <a:pPr>
+              <a:lnSpc>
+                <a:spcPct val="150000"/>
+              </a:lnSpc>
+              <a:buNone/>
+            </a:pPr>
+            <a:endParaRPr kumimoji="0" lang="az-Latn-AZ" altLang="en-US" sz="1100" b="0" i="0" u="none" strike="noStrike" cap="none" normalizeH="0" baseline="0">
+              <a:ln>
+                <a:noFill/>
+              </a:ln>
+              <a:solidFill>
+                <a:schemeClr val="tx1"/>
+              </a:solidFill>
+              <a:effectLst/>
+              <a:latin typeface="Arial" panose="020B0604020202020204" pitchFamily="34" charset="0"/>
+            </a:endParaRPr>
+          </a:p>
+          <a:p>
+            <a:pPr>
+              <a:lnSpc>
+                <a:spcPct val="150000"/>
+              </a:lnSpc>
+              <a:buNone/>
+            </a:pPr>
+            <a:endParaRPr lang="az-Latn-AZ" altLang="en-US" sz="1100">
+              <a:latin typeface="Arial" panose="020B0604020202020204" pitchFamily="34" charset="0"/>
+            </a:endParaRPr>
+          </a:p>
+          <a:p>
+            <a:pPr>
+              <a:lnSpc>
+                <a:spcPct val="150000"/>
+              </a:lnSpc>
+              <a:buNone/>
+            </a:pPr>
+            <a:endParaRPr kumimoji="0" lang="en-US" altLang="en-US" sz="1100" b="0" i="0" u="none" strike="noStrike" cap="none" normalizeH="0" baseline="0">
+              <a:ln>
+                <a:noFill/>
+              </a:ln>
+              <a:solidFill>
+                <a:schemeClr val="tx1"/>
+              </a:solidFill>
+              <a:effectLst/>
+              <a:latin typeface="Arial" panose="020B0604020202020204" pitchFamily="34" charset="0"/>
+            </a:endParaRPr>
+          </a:p>
+        </p:txBody>
+      </p:sp>
+      <p:pic>
+        <p:nvPicPr>
+          <p:cNvPr id="4" name="Picture 3">
+            <a:extLst>
+              <a:ext uri="{FF2B5EF4-FFF2-40B4-BE49-F238E27FC236}">
+                <a16:creationId xmlns:a16="http://schemas.microsoft.com/office/drawing/2014/main" id="{75BCE422-FD33-C9BF-2E27-7388EA0A7405}"/>
+              </a:ext>
+            </a:extLst>
+          </p:cNvPr>
+          <p:cNvPicPr>
+            <a:picLocks noChangeAspect="1"/>
+          </p:cNvPicPr>
+          <p:nvPr/>
+        </p:nvPicPr>
+        <p:blipFill>
+          <a:blip r:embed="rId2"/>
+          <a:stretch>
+            <a:fillRect/>
+          </a:stretch>
+        </p:blipFill>
+        <p:spPr>
+          <a:xfrm>
+            <a:off x="3261298" y="0"/>
+            <a:ext cx="8930702" cy="6858000"/>
+          </a:xfrm>
+          <a:prstGeom prst="rect">
+            <a:avLst/>
+          </a:prstGeom>
+        </p:spPr>
+      </p:pic>
+    </p:spTree>
+    <p:extLst>
+      <p:ext uri="{BB962C8B-B14F-4D97-AF65-F5344CB8AC3E}">
+        <p14:creationId xmlns:p14="http://schemas.microsoft.com/office/powerpoint/2010/main" val="3436193876"/>
+      </p:ext>
+    </p:extLst>
+  </p:cSld>
+  <p:clrMapOvr>
+    <a:masterClrMapping/>
+  </p:clrMapOvr>
+</p:sld>
+</file>
+
+<file path=ppt/slides/slide12.xml><?xml version="1.0" encoding="utf-8"?>
+<p:sld xmlns:a="http://schemas.openxmlformats.org/drawingml/2006/main" xmlns:r="http://schemas.openxmlformats.org/officeDocument/2006/relationships" xmlns:p="http://schemas.openxmlformats.org/presentationml/2006/main">
+  <p:cSld>
+    <p:spTree>
+      <p:nvGrpSpPr>
+        <p:cNvPr id="1" name="">
+          <a:extLst>
+            <a:ext uri="{FF2B5EF4-FFF2-40B4-BE49-F238E27FC236}">
+              <a16:creationId xmlns:a16="http://schemas.microsoft.com/office/drawing/2014/main" id="{1656BF15-9E82-E4B9-221B-D611AECB1899}"/>
+            </a:ext>
+          </a:extLst>
+        </p:cNvPr>
+        <p:cNvGrpSpPr/>
+        <p:nvPr/>
+      </p:nvGrpSpPr>
+      <p:grpSpPr>
+        <a:xfrm>
+          <a:off x="0" y="0"/>
+          <a:ext cx="0" cy="0"/>
+          <a:chOff x="0" y="0"/>
+          <a:chExt cx="0" cy="0"/>
+        </a:xfrm>
+      </p:grpSpPr>
+      <p:sp>
+        <p:nvSpPr>
+          <p:cNvPr id="3" name="TextBox 2">
+            <a:extLst>
+              <a:ext uri="{FF2B5EF4-FFF2-40B4-BE49-F238E27FC236}">
+                <a16:creationId xmlns:a16="http://schemas.microsoft.com/office/drawing/2014/main" id="{29BBC50F-7588-9999-1456-BC5DC6B35A4D}"/>
+              </a:ext>
+            </a:extLst>
+          </p:cNvPr>
+          <p:cNvSpPr txBox="1"/>
+          <p:nvPr/>
+        </p:nvSpPr>
+        <p:spPr>
+          <a:xfrm>
+            <a:off x="217715" y="255046"/>
+            <a:ext cx="2282890" cy="955518"/>
+          </a:xfrm>
+          <a:prstGeom prst="rect">
+            <a:avLst/>
+          </a:prstGeom>
+          <a:noFill/>
+        </p:spPr>
+        <p:txBody>
+          <a:bodyPr wrap="square">
+            <a:spAutoFit/>
+          </a:bodyPr>
+          <a:lstStyle/>
+          <a:p>
+            <a:pPr>
+              <a:lnSpc>
+                <a:spcPct val="150000"/>
+              </a:lnSpc>
+              <a:buNone/>
+            </a:pPr>
+            <a:r>
+              <a:rPr lang="az-Latn-AZ" altLang="en-US" sz="1300">
+                <a:latin typeface="Arial" panose="020B0604020202020204" pitchFamily="34" charset="0"/>
+              </a:rPr>
+              <a:t>Sosial media ikonları olan hissənidə hələki commentə alırıq.</a:t>
+            </a:r>
+            <a:endParaRPr kumimoji="0" lang="en-US" altLang="en-US" sz="1300" b="0" i="0" u="none" strike="noStrike" cap="none" normalizeH="0" baseline="0">
+              <a:ln>
+                <a:noFill/>
+              </a:ln>
+              <a:solidFill>
+                <a:schemeClr val="tx1"/>
+              </a:solidFill>
+              <a:effectLst/>
+              <a:latin typeface="Arial" panose="020B0604020202020204" pitchFamily="34" charset="0"/>
+            </a:endParaRPr>
+          </a:p>
+        </p:txBody>
+      </p:sp>
+      <p:pic>
+        <p:nvPicPr>
+          <p:cNvPr id="4" name="Picture 3">
+            <a:extLst>
+              <a:ext uri="{FF2B5EF4-FFF2-40B4-BE49-F238E27FC236}">
+                <a16:creationId xmlns:a16="http://schemas.microsoft.com/office/drawing/2014/main" id="{0487CD18-CA92-6B6F-BB09-8B556E413741}"/>
+              </a:ext>
+            </a:extLst>
+          </p:cNvPr>
+          <p:cNvPicPr>
+            <a:picLocks noChangeAspect="1"/>
+          </p:cNvPicPr>
+          <p:nvPr/>
+        </p:nvPicPr>
+        <p:blipFill>
+          <a:blip r:embed="rId2"/>
+          <a:stretch>
+            <a:fillRect/>
+          </a:stretch>
+        </p:blipFill>
+        <p:spPr>
+          <a:xfrm>
+            <a:off x="2653862" y="0"/>
+            <a:ext cx="9538138" cy="6858000"/>
+          </a:xfrm>
+          <a:prstGeom prst="rect">
+            <a:avLst/>
+          </a:prstGeom>
+        </p:spPr>
+      </p:pic>
+    </p:spTree>
+    <p:extLst>
+      <p:ext uri="{BB962C8B-B14F-4D97-AF65-F5344CB8AC3E}">
+        <p14:creationId xmlns:p14="http://schemas.microsoft.com/office/powerpoint/2010/main" val="3430666789"/>
+      </p:ext>
+    </p:extLst>
+  </p:cSld>
+  <p:clrMapOvr>
+    <a:masterClrMapping/>
+  </p:clrMapOvr>
+</p:sld>
+</file>
+
+<file path=ppt/slides/slide13.xml><?xml version="1.0" encoding="utf-8"?>
+<p:sld xmlns:a="http://schemas.openxmlformats.org/drawingml/2006/main" xmlns:r="http://schemas.openxmlformats.org/officeDocument/2006/relationships" xmlns:p="http://schemas.openxmlformats.org/presentationml/2006/main">
+  <p:cSld>
+    <p:spTree>
+      <p:nvGrpSpPr>
+        <p:cNvPr id="1" name="">
+          <a:extLst>
+            <a:ext uri="{FF2B5EF4-FFF2-40B4-BE49-F238E27FC236}">
+              <a16:creationId xmlns:a16="http://schemas.microsoft.com/office/drawing/2014/main" id="{CC711822-37D2-78CB-E28C-491D7139035D}"/>
+            </a:ext>
+          </a:extLst>
+        </p:cNvPr>
+        <p:cNvGrpSpPr/>
+        <p:nvPr/>
+      </p:nvGrpSpPr>
+      <p:grpSpPr>
+        <a:xfrm>
+          <a:off x="0" y="0"/>
+          <a:ext cx="0" cy="0"/>
+          <a:chOff x="0" y="0"/>
+          <a:chExt cx="0" cy="0"/>
+        </a:xfrm>
+      </p:grpSpPr>
+      <p:sp>
+        <p:nvSpPr>
+          <p:cNvPr id="3" name="TextBox 2">
+            <a:extLst>
+              <a:ext uri="{FF2B5EF4-FFF2-40B4-BE49-F238E27FC236}">
+                <a16:creationId xmlns:a16="http://schemas.microsoft.com/office/drawing/2014/main" id="{A1D1FF91-031A-A7B7-3B3D-E4F3BBB6E21D}"/>
+              </a:ext>
+            </a:extLst>
+          </p:cNvPr>
+          <p:cNvSpPr txBox="1"/>
+          <p:nvPr/>
+        </p:nvSpPr>
+        <p:spPr>
+          <a:xfrm>
+            <a:off x="217714" y="255046"/>
+            <a:ext cx="11756571" cy="355354"/>
+          </a:xfrm>
+          <a:prstGeom prst="rect">
+            <a:avLst/>
+          </a:prstGeom>
+          <a:noFill/>
+        </p:spPr>
+        <p:txBody>
+          <a:bodyPr wrap="square">
+            <a:spAutoFit/>
+          </a:bodyPr>
+          <a:lstStyle/>
+          <a:p>
+            <a:pPr>
+              <a:lnSpc>
+                <a:spcPct val="150000"/>
+              </a:lnSpc>
+              <a:buNone/>
+            </a:pPr>
+            <a:r>
+              <a:rPr kumimoji="0" lang="en-US" altLang="en-US" sz="1300" b="0" i="0" u="none" strike="noStrike" cap="none" normalizeH="0" baseline="0">
+                <a:ln>
+                  <a:noFill/>
+                </a:ln>
+                <a:solidFill>
+                  <a:schemeClr val="tx1"/>
+                </a:solidFill>
+                <a:effectLst/>
+                <a:latin typeface="Arial" panose="020B0604020202020204" pitchFamily="34" charset="0"/>
+              </a:rPr>
+              <a:t>.</a:t>
+            </a:r>
+          </a:p>
+        </p:txBody>
+      </p:sp>
+    </p:spTree>
+    <p:extLst>
+      <p:ext uri="{BB962C8B-B14F-4D97-AF65-F5344CB8AC3E}">
+        <p14:creationId xmlns:p14="http://schemas.microsoft.com/office/powerpoint/2010/main" val="3134273241"/>
+      </p:ext>
+    </p:extLst>
+  </p:cSld>
+  <p:clrMapOvr>
+    <a:masterClrMapping/>
+  </p:clrMapOvr>
+</p:sld>
+</file>
+
+<file path=ppt/slides/slide14.xml><?xml version="1.0" encoding="utf-8"?>
+<p:sld xmlns:a="http://schemas.openxmlformats.org/drawingml/2006/main" xmlns:r="http://schemas.openxmlformats.org/officeDocument/2006/relationships" xmlns:p="http://schemas.openxmlformats.org/presentationml/2006/main">
+  <p:cSld>
+    <p:spTree>
+      <p:nvGrpSpPr>
+        <p:cNvPr id="1" name="">
+          <a:extLst>
+            <a:ext uri="{FF2B5EF4-FFF2-40B4-BE49-F238E27FC236}">
+              <a16:creationId xmlns:a16="http://schemas.microsoft.com/office/drawing/2014/main" id="{ECE25D7D-A080-F22B-7E8D-36EC827289A1}"/>
+            </a:ext>
+          </a:extLst>
+        </p:cNvPr>
+        <p:cNvGrpSpPr/>
+        <p:nvPr/>
+      </p:nvGrpSpPr>
+      <p:grpSpPr>
+        <a:xfrm>
+          <a:off x="0" y="0"/>
+          <a:ext cx="0" cy="0"/>
+          <a:chOff x="0" y="0"/>
+          <a:chExt cx="0" cy="0"/>
+        </a:xfrm>
+      </p:grpSpPr>
+      <p:sp>
+        <p:nvSpPr>
+          <p:cNvPr id="3" name="TextBox 2">
+            <a:extLst>
+              <a:ext uri="{FF2B5EF4-FFF2-40B4-BE49-F238E27FC236}">
+                <a16:creationId xmlns:a16="http://schemas.microsoft.com/office/drawing/2014/main" id="{E33F16A3-A6E8-401E-847B-09570DC6E4CB}"/>
+              </a:ext>
+            </a:extLst>
+          </p:cNvPr>
+          <p:cNvSpPr txBox="1"/>
+          <p:nvPr/>
+        </p:nvSpPr>
+        <p:spPr>
+          <a:xfrm>
+            <a:off x="217714" y="255046"/>
+            <a:ext cx="11756571" cy="355354"/>
+          </a:xfrm>
+          <a:prstGeom prst="rect">
+            <a:avLst/>
+          </a:prstGeom>
+          <a:noFill/>
+        </p:spPr>
+        <p:txBody>
+          <a:bodyPr wrap="square">
+            <a:spAutoFit/>
+          </a:bodyPr>
+          <a:lstStyle/>
+          <a:p>
+            <a:pPr>
+              <a:lnSpc>
+                <a:spcPct val="150000"/>
+              </a:lnSpc>
+              <a:buNone/>
+            </a:pPr>
+            <a:r>
+              <a:rPr kumimoji="0" lang="en-US" altLang="en-US" sz="1300" b="0" i="0" u="none" strike="noStrike" cap="none" normalizeH="0" baseline="0">
+                <a:ln>
+                  <a:noFill/>
+                </a:ln>
+                <a:solidFill>
+                  <a:schemeClr val="tx1"/>
+                </a:solidFill>
+                <a:effectLst/>
+                <a:latin typeface="Arial" panose="020B0604020202020204" pitchFamily="34" charset="0"/>
+              </a:rPr>
+              <a:t>.</a:t>
+            </a:r>
+          </a:p>
+        </p:txBody>
+      </p:sp>
+    </p:spTree>
+    <p:extLst>
+      <p:ext uri="{BB962C8B-B14F-4D97-AF65-F5344CB8AC3E}">
+        <p14:creationId xmlns:p14="http://schemas.microsoft.com/office/powerpoint/2010/main" val="3095838342"/>
+      </p:ext>
+    </p:extLst>
+  </p:cSld>
+  <p:clrMapOvr>
+    <a:masterClrMapping/>
+  </p:clrMapOvr>
+</p:sld>
+</file>
+
 <file path=ppt/slides/slide2.xml><?xml version="1.0" encoding="utf-8"?>
+<p:sld xmlns:a="http://schemas.openxmlformats.org/drawingml/2006/main" xmlns:r="http://schemas.openxmlformats.org/officeDocument/2006/relationships" xmlns:p="http://schemas.openxmlformats.org/presentationml/2006/main">
+  <p:cSld>
+    <p:spTree>
+      <p:nvGrpSpPr>
+        <p:cNvPr id="1" name="">
+          <a:extLst>
+            <a:ext uri="{FF2B5EF4-FFF2-40B4-BE49-F238E27FC236}">
+              <a16:creationId xmlns:a16="http://schemas.microsoft.com/office/drawing/2014/main" id="{B473AEF2-D043-C8E2-0AA1-CF7E41C4FC7C}"/>
+            </a:ext>
+          </a:extLst>
+        </p:cNvPr>
+        <p:cNvGrpSpPr/>
+        <p:nvPr/>
+      </p:nvGrpSpPr>
+      <p:grpSpPr>
+        <a:xfrm>
+          <a:off x="0" y="0"/>
+          <a:ext cx="0" cy="0"/>
+          <a:chOff x="0" y="0"/>
+          <a:chExt cx="0" cy="0"/>
+        </a:xfrm>
+      </p:grpSpPr>
+      <p:sp>
+        <p:nvSpPr>
+          <p:cNvPr id="3" name="TextBox 2">
+            <a:extLst>
+              <a:ext uri="{FF2B5EF4-FFF2-40B4-BE49-F238E27FC236}">
+                <a16:creationId xmlns:a16="http://schemas.microsoft.com/office/drawing/2014/main" id="{0D7CA6C6-70FF-0772-EA35-3A1AD9B98814}"/>
+              </a:ext>
+            </a:extLst>
+          </p:cNvPr>
+          <p:cNvSpPr txBox="1"/>
+          <p:nvPr/>
+        </p:nvSpPr>
+        <p:spPr>
+          <a:xfrm>
+            <a:off x="217714" y="255046"/>
+            <a:ext cx="4802155" cy="655436"/>
+          </a:xfrm>
+          <a:prstGeom prst="rect">
+            <a:avLst/>
+          </a:prstGeom>
+          <a:noFill/>
+        </p:spPr>
+        <p:txBody>
+          <a:bodyPr wrap="square">
+            <a:spAutoFit/>
+          </a:bodyPr>
+          <a:lstStyle/>
+          <a:p>
+            <a:pPr>
+              <a:lnSpc>
+                <a:spcPct val="150000"/>
+              </a:lnSpc>
+              <a:buNone/>
+            </a:pPr>
+            <a:r>
+              <a:rPr lang="az-Latn-AZ" altLang="en-US" sz="1300">
+                <a:latin typeface="Arial" panose="020B0604020202020204" pitchFamily="34" charset="0"/>
+              </a:rPr>
+              <a:t>Artıq köhnə </a:t>
+            </a:r>
+            <a:r>
+              <a:rPr lang="az-Latn-AZ" altLang="en-US" sz="1300" b="1">
+                <a:latin typeface="Arial" panose="020B0604020202020204" pitchFamily="34" charset="0"/>
+              </a:rPr>
+              <a:t>LOGİN</a:t>
+            </a:r>
+            <a:r>
+              <a:rPr lang="az-Latn-AZ" altLang="en-US" sz="1300">
+                <a:latin typeface="Arial" panose="020B0604020202020204" pitchFamily="34" charset="0"/>
+              </a:rPr>
+              <a:t> səhifəsinin yığılış formasına baxaraq yenisini formalaşdıra bilərik.</a:t>
+            </a:r>
+            <a:endParaRPr kumimoji="0" lang="en-US" altLang="en-US" sz="1300" b="0" i="0" u="none" strike="noStrike" cap="none" normalizeH="0" baseline="0">
+              <a:ln>
+                <a:noFill/>
+              </a:ln>
+              <a:solidFill>
+                <a:schemeClr val="tx1"/>
+              </a:solidFill>
+              <a:effectLst/>
+              <a:latin typeface="Arial" panose="020B0604020202020204" pitchFamily="34" charset="0"/>
+            </a:endParaRPr>
+          </a:p>
+        </p:txBody>
+      </p:sp>
+      <p:pic>
+        <p:nvPicPr>
+          <p:cNvPr id="4" name="Picture 3">
+            <a:extLst>
+              <a:ext uri="{FF2B5EF4-FFF2-40B4-BE49-F238E27FC236}">
+                <a16:creationId xmlns:a16="http://schemas.microsoft.com/office/drawing/2014/main" id="{22745670-FC4B-5976-60AD-B56E5784B481}"/>
+              </a:ext>
+            </a:extLst>
+          </p:cNvPr>
+          <p:cNvPicPr>
+            <a:picLocks noChangeAspect="1"/>
+          </p:cNvPicPr>
+          <p:nvPr/>
+        </p:nvPicPr>
+        <p:blipFill>
+          <a:blip r:embed="rId2"/>
+          <a:stretch>
+            <a:fillRect/>
+          </a:stretch>
+        </p:blipFill>
+        <p:spPr>
+          <a:xfrm>
+            <a:off x="5199674" y="170517"/>
+            <a:ext cx="6992326" cy="6687483"/>
+          </a:xfrm>
+          <a:prstGeom prst="rect">
+            <a:avLst/>
+          </a:prstGeom>
+        </p:spPr>
+      </p:pic>
+    </p:spTree>
+    <p:extLst>
+      <p:ext uri="{BB962C8B-B14F-4D97-AF65-F5344CB8AC3E}">
+        <p14:creationId xmlns:p14="http://schemas.microsoft.com/office/powerpoint/2010/main" val="2859924742"/>
+      </p:ext>
+    </p:extLst>
+  </p:cSld>
+  <p:clrMapOvr>
+    <a:masterClrMapping/>
+  </p:clrMapOvr>
+</p:sld>
+</file>
+
+<file path=ppt/slides/slide3.xml><?xml version="1.0" encoding="utf-8"?>
+<p:sld xmlns:a="http://schemas.openxmlformats.org/drawingml/2006/main" xmlns:r="http://schemas.openxmlformats.org/officeDocument/2006/relationships" xmlns:p="http://schemas.openxmlformats.org/presentationml/2006/main">
+  <p:cSld>
+    <p:spTree>
+      <p:nvGrpSpPr>
+        <p:cNvPr id="1" name="">
+          <a:extLst>
+            <a:ext uri="{FF2B5EF4-FFF2-40B4-BE49-F238E27FC236}">
+              <a16:creationId xmlns:a16="http://schemas.microsoft.com/office/drawing/2014/main" id="{7F8EEC72-6675-E2C7-D620-D0B2FC6BFFC1}"/>
+            </a:ext>
+          </a:extLst>
+        </p:cNvPr>
+        <p:cNvGrpSpPr/>
+        <p:nvPr/>
+      </p:nvGrpSpPr>
+      <p:grpSpPr>
+        <a:xfrm>
+          <a:off x="0" y="0"/>
+          <a:ext cx="0" cy="0"/>
+          <a:chOff x="0" y="0"/>
+          <a:chExt cx="0" cy="0"/>
+        </a:xfrm>
+      </p:grpSpPr>
+      <p:sp>
+        <p:nvSpPr>
+          <p:cNvPr id="3" name="TextBox 2">
+            <a:extLst>
+              <a:ext uri="{FF2B5EF4-FFF2-40B4-BE49-F238E27FC236}">
+                <a16:creationId xmlns:a16="http://schemas.microsoft.com/office/drawing/2014/main" id="{842F7E58-0AA2-6A9B-5995-827C2E55E506}"/>
+              </a:ext>
+            </a:extLst>
+          </p:cNvPr>
+          <p:cNvSpPr txBox="1"/>
+          <p:nvPr/>
+        </p:nvSpPr>
+        <p:spPr>
+          <a:xfrm>
+            <a:off x="217714" y="55986"/>
+            <a:ext cx="11756571" cy="355354"/>
+          </a:xfrm>
+          <a:prstGeom prst="rect">
+            <a:avLst/>
+          </a:prstGeom>
+          <a:noFill/>
+        </p:spPr>
+        <p:txBody>
+          <a:bodyPr wrap="square">
+            <a:spAutoFit/>
+          </a:bodyPr>
+          <a:lstStyle/>
+          <a:p>
+            <a:pPr>
+              <a:lnSpc>
+                <a:spcPct val="150000"/>
+              </a:lnSpc>
+              <a:buNone/>
+            </a:pPr>
+            <a:r>
+              <a:rPr lang="az-Latn-AZ" altLang="en-US" sz="1300">
+                <a:latin typeface="Arial" panose="020B0604020202020204" pitchFamily="34" charset="0"/>
+              </a:rPr>
+              <a:t>Sağ tərəfdəkinə baxaraq bəzi lazım olan hissələri yeni sol tərəfdəki elementlər olan hissələrə yazırıq.</a:t>
+            </a:r>
+            <a:endParaRPr kumimoji="0" lang="en-US" altLang="en-US" sz="1300" b="0" i="0" u="none" strike="noStrike" cap="none" normalizeH="0" baseline="0">
+              <a:ln>
+                <a:noFill/>
+              </a:ln>
+              <a:solidFill>
+                <a:schemeClr val="tx1"/>
+              </a:solidFill>
+              <a:effectLst/>
+              <a:latin typeface="Arial" panose="020B0604020202020204" pitchFamily="34" charset="0"/>
+            </a:endParaRPr>
+          </a:p>
+        </p:txBody>
+      </p:sp>
+      <p:pic>
+        <p:nvPicPr>
+          <p:cNvPr id="4" name="Picture 3">
+            <a:extLst>
+              <a:ext uri="{FF2B5EF4-FFF2-40B4-BE49-F238E27FC236}">
+                <a16:creationId xmlns:a16="http://schemas.microsoft.com/office/drawing/2014/main" id="{4950E1F8-9A69-C646-D0C5-FD0E309ECD44}"/>
+              </a:ext>
+            </a:extLst>
+          </p:cNvPr>
+          <p:cNvPicPr>
+            <a:picLocks noChangeAspect="1"/>
+          </p:cNvPicPr>
+          <p:nvPr/>
+        </p:nvPicPr>
+        <p:blipFill>
+          <a:blip r:embed="rId2"/>
+          <a:stretch>
+            <a:fillRect/>
+          </a:stretch>
+        </p:blipFill>
+        <p:spPr>
+          <a:xfrm>
+            <a:off x="0" y="476959"/>
+            <a:ext cx="12192000" cy="6381041"/>
+          </a:xfrm>
+          <a:prstGeom prst="rect">
+            <a:avLst/>
+          </a:prstGeom>
+        </p:spPr>
+      </p:pic>
+    </p:spTree>
+    <p:extLst>
+      <p:ext uri="{BB962C8B-B14F-4D97-AF65-F5344CB8AC3E}">
+        <p14:creationId xmlns:p14="http://schemas.microsoft.com/office/powerpoint/2010/main" val="2959271690"/>
+      </p:ext>
+    </p:extLst>
+  </p:cSld>
+  <p:clrMapOvr>
+    <a:masterClrMapping/>
+  </p:clrMapOvr>
+</p:sld>
+</file>
+
+<file path=ppt/slides/slide4.xml><?xml version="1.0" encoding="utf-8"?>
+<p:sld xmlns:a="http://schemas.openxmlformats.org/drawingml/2006/main" xmlns:r="http://schemas.openxmlformats.org/officeDocument/2006/relationships" xmlns:p="http://schemas.openxmlformats.org/presentationml/2006/main">
+  <p:cSld>
+    <p:spTree>
+      <p:nvGrpSpPr>
+        <p:cNvPr id="1" name="">
+          <a:extLst>
+            <a:ext uri="{FF2B5EF4-FFF2-40B4-BE49-F238E27FC236}">
+              <a16:creationId xmlns:a16="http://schemas.microsoft.com/office/drawing/2014/main" id="{E23D5DED-D6B3-D986-DE75-CCA62FC7A667}"/>
+            </a:ext>
+          </a:extLst>
+        </p:cNvPr>
+        <p:cNvGrpSpPr/>
+        <p:nvPr/>
+      </p:nvGrpSpPr>
+      <p:grpSpPr>
+        <a:xfrm>
+          <a:off x="0" y="0"/>
+          <a:ext cx="0" cy="0"/>
+          <a:chOff x="0" y="0"/>
+          <a:chExt cx="0" cy="0"/>
+        </a:xfrm>
+      </p:grpSpPr>
+      <p:sp>
+        <p:nvSpPr>
+          <p:cNvPr id="3" name="TextBox 2">
+            <a:extLst>
+              <a:ext uri="{FF2B5EF4-FFF2-40B4-BE49-F238E27FC236}">
+                <a16:creationId xmlns:a16="http://schemas.microsoft.com/office/drawing/2014/main" id="{2F87B370-C0D8-BC62-2207-E1C7C27B82EA}"/>
+              </a:ext>
+            </a:extLst>
+          </p:cNvPr>
+          <p:cNvSpPr txBox="1"/>
+          <p:nvPr/>
+        </p:nvSpPr>
+        <p:spPr>
+          <a:xfrm>
+            <a:off x="217714" y="72598"/>
+            <a:ext cx="11756571" cy="355354"/>
+          </a:xfrm>
+          <a:prstGeom prst="rect">
+            <a:avLst/>
+          </a:prstGeom>
+          <a:noFill/>
+        </p:spPr>
+        <p:txBody>
+          <a:bodyPr wrap="square">
+            <a:spAutoFit/>
+          </a:bodyPr>
+          <a:lstStyle/>
+          <a:p>
+            <a:pPr>
+              <a:lnSpc>
+                <a:spcPct val="150000"/>
+              </a:lnSpc>
+              <a:buNone/>
+            </a:pPr>
+            <a:r>
+              <a:rPr lang="az-Latn-AZ" altLang="en-US" sz="1300" b="1">
+                <a:latin typeface="Arial" panose="020B0604020202020204" pitchFamily="34" charset="0"/>
+              </a:rPr>
+              <a:t>TOASTR</a:t>
+            </a:r>
+            <a:r>
+              <a:rPr lang="az-Latn-AZ" altLang="en-US" sz="1300">
+                <a:latin typeface="Arial" panose="020B0604020202020204" pitchFamily="34" charset="0"/>
+              </a:rPr>
+              <a:t> üçün istifadə edilən kodlarımızı, </a:t>
+            </a:r>
+            <a:r>
+              <a:rPr lang="az-Latn-AZ" altLang="en-US" sz="1300" b="1">
+                <a:latin typeface="Arial" panose="020B0604020202020204" pitchFamily="34" charset="0"/>
+              </a:rPr>
+              <a:t>admin</a:t>
+            </a:r>
+            <a:r>
+              <a:rPr lang="az-Latn-AZ" altLang="en-US" sz="1300">
+                <a:latin typeface="Arial" panose="020B0604020202020204" pitchFamily="34" charset="0"/>
+              </a:rPr>
+              <a:t> -in, </a:t>
+            </a:r>
+            <a:r>
+              <a:rPr lang="az-Latn-AZ" altLang="en-US" sz="1300" b="1">
+                <a:latin typeface="Arial" panose="020B0604020202020204" pitchFamily="34" charset="0"/>
+              </a:rPr>
+              <a:t>master.blade.php </a:t>
+            </a:r>
+            <a:r>
+              <a:rPr lang="az-Latn-AZ" altLang="en-US" sz="1300">
+                <a:latin typeface="Arial" panose="020B0604020202020204" pitchFamily="34" charset="0"/>
+              </a:rPr>
+              <a:t>faylından köçürürürük </a:t>
+            </a:r>
+            <a:r>
+              <a:rPr lang="az-Latn-AZ" altLang="en-US" sz="1300" b="1">
+                <a:latin typeface="Arial" panose="020B0604020202020204" pitchFamily="34" charset="0"/>
+              </a:rPr>
+              <a:t>front</a:t>
+            </a:r>
+            <a:r>
+              <a:rPr lang="az-Latn-AZ" altLang="en-US" sz="1300">
+                <a:latin typeface="Arial" panose="020B0604020202020204" pitchFamily="34" charset="0"/>
+              </a:rPr>
+              <a:t> -un </a:t>
+            </a:r>
+            <a:r>
+              <a:rPr lang="az-Latn-AZ" altLang="en-US" sz="1300" b="1">
+                <a:latin typeface="Arial" panose="020B0604020202020204" pitchFamily="34" charset="0"/>
+              </a:rPr>
+              <a:t>master.blade.php </a:t>
+            </a:r>
+            <a:r>
+              <a:rPr lang="az-Latn-AZ" altLang="en-US" sz="1300">
+                <a:latin typeface="Arial" panose="020B0604020202020204" pitchFamily="34" charset="0"/>
+              </a:rPr>
+              <a:t>faylına.</a:t>
+            </a:r>
+            <a:endParaRPr kumimoji="0" lang="en-US" altLang="en-US" sz="1300" b="0" i="0" u="none" strike="noStrike" cap="none" normalizeH="0" baseline="0">
+              <a:ln>
+                <a:noFill/>
+              </a:ln>
+              <a:solidFill>
+                <a:schemeClr val="tx1"/>
+              </a:solidFill>
+              <a:effectLst/>
+              <a:latin typeface="Arial" panose="020B0604020202020204" pitchFamily="34" charset="0"/>
+            </a:endParaRPr>
+          </a:p>
+        </p:txBody>
+      </p:sp>
+      <p:pic>
+        <p:nvPicPr>
+          <p:cNvPr id="4" name="Picture 3">
+            <a:extLst>
+              <a:ext uri="{FF2B5EF4-FFF2-40B4-BE49-F238E27FC236}">
+                <a16:creationId xmlns:a16="http://schemas.microsoft.com/office/drawing/2014/main" id="{33CC9B8A-D4A4-4A37-E164-0B1A99B663C6}"/>
+              </a:ext>
+            </a:extLst>
+          </p:cNvPr>
+          <p:cNvPicPr>
+            <a:picLocks noChangeAspect="1"/>
+          </p:cNvPicPr>
+          <p:nvPr/>
+        </p:nvPicPr>
+        <p:blipFill>
+          <a:blip r:embed="rId2"/>
+          <a:stretch>
+            <a:fillRect/>
+          </a:stretch>
+        </p:blipFill>
+        <p:spPr>
+          <a:xfrm>
+            <a:off x="0" y="502596"/>
+            <a:ext cx="12192000" cy="6355404"/>
+          </a:xfrm>
+          <a:prstGeom prst="rect">
+            <a:avLst/>
+          </a:prstGeom>
+        </p:spPr>
+      </p:pic>
+    </p:spTree>
+    <p:extLst>
+      <p:ext uri="{BB962C8B-B14F-4D97-AF65-F5344CB8AC3E}">
+        <p14:creationId xmlns:p14="http://schemas.microsoft.com/office/powerpoint/2010/main" val="3924457404"/>
+      </p:ext>
+    </p:extLst>
+  </p:cSld>
+  <p:clrMapOvr>
+    <a:masterClrMapping/>
+  </p:clrMapOvr>
+</p:sld>
+</file>
+
+<file path=ppt/slides/slide5.xml><?xml version="1.0" encoding="utf-8"?>
+<p:sld xmlns:a="http://schemas.openxmlformats.org/drawingml/2006/main" xmlns:r="http://schemas.openxmlformats.org/officeDocument/2006/relationships" xmlns:p="http://schemas.openxmlformats.org/presentationml/2006/main">
+  <p:cSld>
+    <p:spTree>
+      <p:nvGrpSpPr>
+        <p:cNvPr id="1" name="">
+          <a:extLst>
+            <a:ext uri="{FF2B5EF4-FFF2-40B4-BE49-F238E27FC236}">
+              <a16:creationId xmlns:a16="http://schemas.microsoft.com/office/drawing/2014/main" id="{418DDF96-8D42-1771-030A-554F3AA69B90}"/>
+            </a:ext>
+          </a:extLst>
+        </p:cNvPr>
+        <p:cNvGrpSpPr/>
+        <p:nvPr/>
+      </p:nvGrpSpPr>
+      <p:grpSpPr>
+        <a:xfrm>
+          <a:off x="0" y="0"/>
+          <a:ext cx="0" cy="0"/>
+          <a:chOff x="0" y="0"/>
+          <a:chExt cx="0" cy="0"/>
+        </a:xfrm>
+      </p:grpSpPr>
+      <p:sp>
+        <p:nvSpPr>
+          <p:cNvPr id="3" name="TextBox 2">
+            <a:extLst>
+              <a:ext uri="{FF2B5EF4-FFF2-40B4-BE49-F238E27FC236}">
+                <a16:creationId xmlns:a16="http://schemas.microsoft.com/office/drawing/2014/main" id="{688BFBB8-AB84-3A02-8078-DAC4ED4DDD66}"/>
+              </a:ext>
+            </a:extLst>
+          </p:cNvPr>
+          <p:cNvSpPr txBox="1"/>
+          <p:nvPr/>
+        </p:nvSpPr>
+        <p:spPr>
+          <a:xfrm>
+            <a:off x="217714" y="87095"/>
+            <a:ext cx="11756571" cy="355354"/>
+          </a:xfrm>
+          <a:prstGeom prst="rect">
+            <a:avLst/>
+          </a:prstGeom>
+          <a:noFill/>
+        </p:spPr>
+        <p:txBody>
+          <a:bodyPr wrap="square">
+            <a:spAutoFit/>
+          </a:bodyPr>
+          <a:lstStyle/>
+          <a:p>
+            <a:pPr>
+              <a:lnSpc>
+                <a:spcPct val="150000"/>
+              </a:lnSpc>
+              <a:buNone/>
+            </a:pPr>
+            <a:r>
+              <a:rPr lang="az-Latn-AZ" altLang="en-US" sz="1300">
+                <a:latin typeface="Arial" panose="020B0604020202020204" pitchFamily="34" charset="0"/>
+              </a:rPr>
+              <a:t>Burada da </a:t>
+            </a:r>
+            <a:r>
+              <a:rPr lang="az-Latn-AZ" altLang="en-US" sz="1300" b="1">
+                <a:latin typeface="Arial" panose="020B0604020202020204" pitchFamily="34" charset="0"/>
+              </a:rPr>
+              <a:t>script</a:t>
+            </a:r>
+            <a:r>
+              <a:rPr lang="az-Latn-AZ" altLang="en-US" sz="1300">
+                <a:latin typeface="Arial" panose="020B0604020202020204" pitchFamily="34" charset="0"/>
+              </a:rPr>
+              <a:t> kodlarını köçürdük.</a:t>
+            </a:r>
+            <a:endParaRPr kumimoji="0" lang="en-US" altLang="en-US" sz="1300" b="0" i="0" u="none" strike="noStrike" cap="none" normalizeH="0" baseline="0">
+              <a:ln>
+                <a:noFill/>
+              </a:ln>
+              <a:solidFill>
+                <a:schemeClr val="tx1"/>
+              </a:solidFill>
+              <a:effectLst/>
+              <a:latin typeface="Arial" panose="020B0604020202020204" pitchFamily="34" charset="0"/>
+            </a:endParaRPr>
+          </a:p>
+        </p:txBody>
+      </p:sp>
+      <p:pic>
+        <p:nvPicPr>
+          <p:cNvPr id="4" name="Picture 3">
+            <a:extLst>
+              <a:ext uri="{FF2B5EF4-FFF2-40B4-BE49-F238E27FC236}">
+                <a16:creationId xmlns:a16="http://schemas.microsoft.com/office/drawing/2014/main" id="{64DF20F9-7B61-9B0A-0CB9-92B9AECDC134}"/>
+              </a:ext>
+            </a:extLst>
+          </p:cNvPr>
+          <p:cNvPicPr>
+            <a:picLocks noChangeAspect="1"/>
+          </p:cNvPicPr>
+          <p:nvPr/>
+        </p:nvPicPr>
+        <p:blipFill>
+          <a:blip r:embed="rId2"/>
+          <a:stretch>
+            <a:fillRect/>
+          </a:stretch>
+        </p:blipFill>
+        <p:spPr>
+          <a:xfrm>
+            <a:off x="0" y="518419"/>
+            <a:ext cx="12192000" cy="6339581"/>
+          </a:xfrm>
+          <a:prstGeom prst="rect">
+            <a:avLst/>
+          </a:prstGeom>
+        </p:spPr>
+      </p:pic>
+    </p:spTree>
+    <p:extLst>
+      <p:ext uri="{BB962C8B-B14F-4D97-AF65-F5344CB8AC3E}">
+        <p14:creationId xmlns:p14="http://schemas.microsoft.com/office/powerpoint/2010/main" val="431308890"/>
+      </p:ext>
+    </p:extLst>
+  </p:cSld>
+  <p:clrMapOvr>
+    <a:masterClrMapping/>
+  </p:clrMapOvr>
+</p:sld>
+</file>
+
+<file path=ppt/slides/slide6.xml><?xml version="1.0" encoding="utf-8"?>
+<p:sld xmlns:a="http://schemas.openxmlformats.org/drawingml/2006/main" xmlns:r="http://schemas.openxmlformats.org/officeDocument/2006/relationships" xmlns:p="http://schemas.openxmlformats.org/presentationml/2006/main">
+  <p:cSld>
+    <p:spTree>
+      <p:nvGrpSpPr>
+        <p:cNvPr id="1" name="">
+          <a:extLst>
+            <a:ext uri="{FF2B5EF4-FFF2-40B4-BE49-F238E27FC236}">
+              <a16:creationId xmlns:a16="http://schemas.microsoft.com/office/drawing/2014/main" id="{14E9452A-4189-9687-E57F-98DCD6C368D1}"/>
+            </a:ext>
+          </a:extLst>
+        </p:cNvPr>
+        <p:cNvGrpSpPr/>
+        <p:nvPr/>
+      </p:nvGrpSpPr>
+      <p:grpSpPr>
+        <a:xfrm>
+          <a:off x="0" y="0"/>
+          <a:ext cx="0" cy="0"/>
+          <a:chOff x="0" y="0"/>
+          <a:chExt cx="0" cy="0"/>
+        </a:xfrm>
+      </p:grpSpPr>
+      <p:sp>
+        <p:nvSpPr>
+          <p:cNvPr id="3" name="TextBox 2">
+            <a:extLst>
+              <a:ext uri="{FF2B5EF4-FFF2-40B4-BE49-F238E27FC236}">
+                <a16:creationId xmlns:a16="http://schemas.microsoft.com/office/drawing/2014/main" id="{99C2334E-9B68-1C48-0D8E-51C7E8AF77ED}"/>
+              </a:ext>
+            </a:extLst>
+          </p:cNvPr>
+          <p:cNvSpPr txBox="1"/>
+          <p:nvPr/>
+        </p:nvSpPr>
+        <p:spPr>
+          <a:xfrm>
+            <a:off x="217714" y="255046"/>
+            <a:ext cx="11756571" cy="2455929"/>
+          </a:xfrm>
+          <a:prstGeom prst="rect">
+            <a:avLst/>
+          </a:prstGeom>
+          <a:noFill/>
+        </p:spPr>
+        <p:txBody>
+          <a:bodyPr wrap="square">
+            <a:spAutoFit/>
+          </a:bodyPr>
+          <a:lstStyle/>
+          <a:p>
+            <a:pPr>
+              <a:lnSpc>
+                <a:spcPct val="150000"/>
+              </a:lnSpc>
+              <a:buNone/>
+            </a:pPr>
+            <a:r>
+              <a:rPr lang="az-Latn-AZ" altLang="en-US" sz="1300">
+                <a:latin typeface="Arial" panose="020B0604020202020204" pitchFamily="34" charset="0"/>
+              </a:rPr>
+              <a:t>İndi isə </a:t>
+            </a:r>
+            <a:r>
+              <a:rPr lang="az-Latn-AZ" altLang="en-US" sz="1300" b="1">
+                <a:latin typeface="Arial" panose="020B0604020202020204" pitchFamily="34" charset="0"/>
+              </a:rPr>
+              <a:t>REGİSTER</a:t>
+            </a:r>
+            <a:r>
+              <a:rPr lang="az-Latn-AZ" altLang="en-US" sz="1300">
+                <a:latin typeface="Arial" panose="020B0604020202020204" pitchFamily="34" charset="0"/>
+              </a:rPr>
+              <a:t> üçün istifadə edilən bölməni </a:t>
+            </a:r>
+            <a:r>
+              <a:rPr lang="az-Latn-AZ" altLang="en-US" sz="1300" b="1">
+                <a:latin typeface="Arial" panose="020B0604020202020204" pitchFamily="34" charset="0"/>
+              </a:rPr>
+              <a:t>konfiqurasiya</a:t>
+            </a:r>
+            <a:r>
+              <a:rPr lang="az-Latn-AZ" altLang="en-US" sz="1300">
+                <a:latin typeface="Arial" panose="020B0604020202020204" pitchFamily="34" charset="0"/>
+              </a:rPr>
+              <a:t> edək. Normalda </a:t>
+            </a:r>
+            <a:r>
+              <a:rPr lang="az-Latn-AZ" altLang="en-US" sz="1300" b="1">
+                <a:latin typeface="Arial" panose="020B0604020202020204" pitchFamily="34" charset="0"/>
+              </a:rPr>
+              <a:t>URL</a:t>
+            </a:r>
+            <a:r>
+              <a:rPr lang="az-Latn-AZ" altLang="en-US" sz="1300">
+                <a:latin typeface="Arial" panose="020B0604020202020204" pitchFamily="34" charset="0"/>
+              </a:rPr>
+              <a:t> bölməsində </a:t>
+            </a:r>
+            <a:r>
+              <a:rPr lang="az-Latn-AZ" altLang="en-US" sz="1300" b="1">
+                <a:latin typeface="Arial" panose="020B0604020202020204" pitchFamily="34" charset="0"/>
+              </a:rPr>
+              <a:t>register</a:t>
+            </a:r>
+            <a:r>
+              <a:rPr lang="az-Latn-AZ" altLang="en-US" sz="1300">
+                <a:latin typeface="Arial" panose="020B0604020202020204" pitchFamily="34" charset="0"/>
+              </a:rPr>
+              <a:t> səhifəsinə daxil olduqda belə bir </a:t>
+            </a:r>
+            <a:r>
+              <a:rPr lang="az-Latn-AZ" altLang="en-US" sz="1300" b="1">
+                <a:latin typeface="Arial" panose="020B0604020202020204" pitchFamily="34" charset="0"/>
+              </a:rPr>
+              <a:t>URL</a:t>
+            </a:r>
+            <a:r>
+              <a:rPr lang="az-Latn-AZ" altLang="en-US" sz="1300">
+                <a:latin typeface="Arial" panose="020B0604020202020204" pitchFamily="34" charset="0"/>
+              </a:rPr>
+              <a:t> görürük:</a:t>
+            </a:r>
+          </a:p>
+          <a:p>
+            <a:pPr marL="742950" lvl="1" indent="-285750">
+              <a:lnSpc>
+                <a:spcPct val="150000"/>
+              </a:lnSpc>
+              <a:buFont typeface="Wingdings" panose="05000000000000000000" pitchFamily="2" charset="2"/>
+              <a:buChar char="q"/>
+            </a:pPr>
+            <a:r>
+              <a:rPr lang="az-Latn-AZ" altLang="en-US" sz="1300" u="sng">
+                <a:solidFill>
+                  <a:srgbClr val="0070C0"/>
+                </a:solidFill>
+                <a:latin typeface="Arial" panose="020B0604020202020204" pitchFamily="34" charset="0"/>
+              </a:rPr>
+              <a:t>http://vendor-e-commerce.test/register</a:t>
+            </a:r>
+          </a:p>
+          <a:p>
+            <a:pPr>
+              <a:lnSpc>
+                <a:spcPct val="150000"/>
+              </a:lnSpc>
+              <a:buNone/>
+            </a:pPr>
+            <a:endParaRPr lang="az-Latn-AZ" altLang="en-US" sz="1300">
+              <a:latin typeface="Arial" panose="020B0604020202020204" pitchFamily="34" charset="0"/>
+            </a:endParaRPr>
+          </a:p>
+          <a:p>
+            <a:pPr>
+              <a:lnSpc>
+                <a:spcPct val="150000"/>
+              </a:lnSpc>
+              <a:buNone/>
+            </a:pPr>
+            <a:r>
+              <a:rPr lang="az-Latn-AZ" altLang="en-US" sz="1300">
+                <a:latin typeface="Arial" panose="020B0604020202020204" pitchFamily="34" charset="0"/>
+              </a:rPr>
+              <a:t>Ancaq bizim </a:t>
+            </a:r>
+            <a:r>
+              <a:rPr lang="az-Latn-AZ" altLang="en-US" sz="1300" b="1">
+                <a:latin typeface="Arial" panose="020B0604020202020204" pitchFamily="34" charset="0"/>
+              </a:rPr>
+              <a:t>FRONT</a:t>
+            </a:r>
+            <a:r>
+              <a:rPr lang="az-Latn-AZ" altLang="en-US" sz="1300">
+                <a:latin typeface="Arial" panose="020B0604020202020204" pitchFamily="34" charset="0"/>
+              </a:rPr>
+              <a:t> -umuzda bu bölmə </a:t>
+            </a:r>
+            <a:r>
+              <a:rPr lang="az-Latn-AZ" altLang="en-US" sz="1300" b="1">
+                <a:latin typeface="Arial" panose="020B0604020202020204" pitchFamily="34" charset="0"/>
+              </a:rPr>
+              <a:t>TAB</a:t>
+            </a:r>
+            <a:r>
+              <a:rPr lang="az-Latn-AZ" altLang="en-US" sz="1300">
+                <a:latin typeface="Arial" panose="020B0604020202020204" pitchFamily="34" charset="0"/>
+              </a:rPr>
+              <a:t> keçidi ilə yaradıldığı üçün, `</a:t>
+            </a:r>
+            <a:r>
+              <a:rPr lang="az-Latn-AZ" altLang="en-US" sz="1300" b="1">
+                <a:latin typeface="Arial" panose="020B0604020202020204" pitchFamily="34" charset="0"/>
+              </a:rPr>
+              <a:t>Sign up</a:t>
+            </a:r>
+            <a:r>
+              <a:rPr lang="az-Latn-AZ" altLang="en-US" sz="1300">
+                <a:latin typeface="Arial" panose="020B0604020202020204" pitchFamily="34" charset="0"/>
+              </a:rPr>
+              <a:t>` sözünə kliklədikdə </a:t>
+            </a:r>
+            <a:r>
+              <a:rPr lang="az-Latn-AZ" altLang="en-US" sz="1300" b="1">
+                <a:latin typeface="Arial" panose="020B0604020202020204" pitchFamily="34" charset="0"/>
+              </a:rPr>
+              <a:t>URL</a:t>
+            </a:r>
+            <a:r>
+              <a:rPr lang="az-Latn-AZ" altLang="en-US" sz="1300">
+                <a:latin typeface="Arial" panose="020B0604020202020204" pitchFamily="34" charset="0"/>
+              </a:rPr>
+              <a:t> bölməsində </a:t>
+            </a:r>
+            <a:r>
+              <a:rPr lang="az-Latn-AZ" altLang="en-US" sz="1300" b="1">
+                <a:latin typeface="Arial" panose="020B0604020202020204" pitchFamily="34" charset="0"/>
+              </a:rPr>
+              <a:t>login</a:t>
+            </a:r>
+            <a:r>
+              <a:rPr lang="az-Latn-AZ" altLang="en-US" sz="1300">
+                <a:latin typeface="Arial" panose="020B0604020202020204" pitchFamily="34" charset="0"/>
+              </a:rPr>
+              <a:t> yazısı qalır:</a:t>
+            </a:r>
+          </a:p>
+          <a:p>
+            <a:pPr marL="742950" lvl="1" indent="-285750">
+              <a:lnSpc>
+                <a:spcPct val="150000"/>
+              </a:lnSpc>
+              <a:buFont typeface="Wingdings" panose="05000000000000000000" pitchFamily="2" charset="2"/>
+              <a:buChar char="q"/>
+            </a:pPr>
+            <a:r>
+              <a:rPr lang="az-Latn-AZ" altLang="en-US" sz="1300" u="sng">
+                <a:solidFill>
+                  <a:srgbClr val="0070C0"/>
+                </a:solidFill>
+                <a:latin typeface="Arial" panose="020B0604020202020204" pitchFamily="34" charset="0"/>
+              </a:rPr>
+              <a:t>http://vendor-e-commerce.test/login</a:t>
+            </a:r>
+          </a:p>
+          <a:p>
+            <a:pPr>
+              <a:lnSpc>
+                <a:spcPct val="150000"/>
+              </a:lnSpc>
+              <a:buNone/>
+            </a:pPr>
+            <a:endParaRPr lang="az-Latn-AZ" altLang="en-US" sz="1300">
+              <a:latin typeface="Arial" panose="020B0604020202020204" pitchFamily="34" charset="0"/>
+            </a:endParaRPr>
+          </a:p>
+          <a:p>
+            <a:pPr>
+              <a:lnSpc>
+                <a:spcPct val="150000"/>
+              </a:lnSpc>
+              <a:buNone/>
+            </a:pPr>
+            <a:endParaRPr lang="az-Latn-AZ" altLang="en-US" sz="1300">
+              <a:latin typeface="Arial" panose="020B0604020202020204" pitchFamily="34" charset="0"/>
+            </a:endParaRPr>
+          </a:p>
+          <a:p>
+            <a:pPr>
+              <a:lnSpc>
+                <a:spcPct val="150000"/>
+              </a:lnSpc>
+              <a:buNone/>
+            </a:pPr>
+            <a:endParaRPr lang="az-Latn-AZ" altLang="en-US" sz="1300">
+              <a:latin typeface="Arial" panose="020B0604020202020204" pitchFamily="34" charset="0"/>
+            </a:endParaRPr>
+          </a:p>
+        </p:txBody>
+      </p:sp>
+      <p:pic>
+        <p:nvPicPr>
+          <p:cNvPr id="4" name="Picture 3">
+            <a:extLst>
+              <a:ext uri="{FF2B5EF4-FFF2-40B4-BE49-F238E27FC236}">
+                <a16:creationId xmlns:a16="http://schemas.microsoft.com/office/drawing/2014/main" id="{19EB9AFE-67F4-B772-2395-7F262F332B32}"/>
+              </a:ext>
+            </a:extLst>
+          </p:cNvPr>
+          <p:cNvPicPr>
+            <a:picLocks noChangeAspect="1"/>
+          </p:cNvPicPr>
+          <p:nvPr/>
+        </p:nvPicPr>
+        <p:blipFill>
+          <a:blip r:embed="rId2"/>
+          <a:srcRect b="21485"/>
+          <a:stretch>
+            <a:fillRect/>
+          </a:stretch>
+        </p:blipFill>
+        <p:spPr>
+          <a:xfrm>
+            <a:off x="0" y="2084169"/>
+            <a:ext cx="12192000" cy="4773831"/>
+          </a:xfrm>
+          <a:prstGeom prst="rect">
+            <a:avLst/>
+          </a:prstGeom>
+        </p:spPr>
+      </p:pic>
+    </p:spTree>
+    <p:extLst>
+      <p:ext uri="{BB962C8B-B14F-4D97-AF65-F5344CB8AC3E}">
+        <p14:creationId xmlns:p14="http://schemas.microsoft.com/office/powerpoint/2010/main" val="2844978785"/>
+      </p:ext>
+    </p:extLst>
+  </p:cSld>
+  <p:clrMapOvr>
+    <a:masterClrMapping/>
+  </p:clrMapOvr>
+</p:sld>
+</file>
+
+<file path=ppt/slides/slide7.xml><?xml version="1.0" encoding="utf-8"?>
 <p:sld xmlns:a="http://schemas.openxmlformats.org/drawingml/2006/main" xmlns:r="http://schemas.openxmlformats.org/officeDocument/2006/relationships" xmlns:p="http://schemas.openxmlformats.org/presentationml/2006/main">
   <p:cSld>
     <p:spTree>
@@ -3434,8 +5148,8 @@
         </p:nvSpPr>
         <p:spPr>
           <a:xfrm>
-            <a:off x="217714" y="255046"/>
-            <a:ext cx="11756571" cy="355354"/>
+            <a:off x="217715" y="255046"/>
+            <a:ext cx="6183086" cy="655436"/>
           </a:xfrm>
           <a:prstGeom prst="rect">
             <a:avLst/>
@@ -3455,21 +5169,114 @@
               <a:buNone/>
             </a:pPr>
             <a:r>
-              <a:rPr kumimoji="0" lang="en-US" altLang="en-US" sz="1300" b="0" i="0" u="none" strike="noStrike" cap="none" normalizeH="0" baseline="0">
-                <a:ln>
-                  <a:noFill/>
-                </a:ln>
-                <a:solidFill>
-                  <a:schemeClr val="tx1"/>
-                </a:solidFill>
-                <a:effectLst/>
-                <a:latin typeface="Arial" panose="020B0604020202020204" pitchFamily="34" charset="0"/>
-              </a:rPr>
-              <a:t>.</a:t>
-            </a:r>
-          </a:p>
-        </p:txBody>
-      </p:sp>
+              <a:rPr lang="az-Latn-AZ" altLang="en-US" sz="1300">
+                <a:latin typeface="Arial" panose="020B0604020202020204" pitchFamily="34" charset="0"/>
+              </a:rPr>
+              <a:t>İlk öncə </a:t>
+            </a:r>
+            <a:r>
+              <a:rPr lang="az-Latn-AZ" altLang="en-US" sz="1300" b="1">
+                <a:latin typeface="Arial" panose="020B0604020202020204" pitchFamily="34" charset="0"/>
+              </a:rPr>
+              <a:t>AUTH</a:t>
+            </a:r>
+            <a:r>
+              <a:rPr lang="az-Latn-AZ" altLang="en-US" sz="1300">
+                <a:latin typeface="Arial" panose="020B0604020202020204" pitchFamily="34" charset="0"/>
+              </a:rPr>
+              <a:t> üçün istifadə edilən </a:t>
+            </a:r>
+            <a:r>
+              <a:rPr lang="az-Latn-AZ" altLang="en-US" sz="1300" b="1">
+                <a:latin typeface="Arial" panose="020B0604020202020204" pitchFamily="34" charset="0"/>
+              </a:rPr>
+              <a:t>ROUTE</a:t>
+            </a:r>
+            <a:r>
+              <a:rPr lang="az-Latn-AZ" altLang="en-US" sz="1300">
+                <a:latin typeface="Arial" panose="020B0604020202020204" pitchFamily="34" charset="0"/>
+              </a:rPr>
+              <a:t> -ların olduğu `</a:t>
+            </a:r>
+            <a:r>
+              <a:rPr lang="az-Latn-AZ" altLang="en-US" sz="1300" b="1">
+                <a:latin typeface="Arial" panose="020B0604020202020204" pitchFamily="34" charset="0"/>
+              </a:rPr>
+              <a:t>routes\auth.php</a:t>
+            </a:r>
+            <a:r>
+              <a:rPr lang="az-Latn-AZ" altLang="en-US" sz="1300">
+                <a:latin typeface="Arial" panose="020B0604020202020204" pitchFamily="34" charset="0"/>
+              </a:rPr>
+              <a:t>` faylına daxil oluruq. Sonra isə, </a:t>
+            </a:r>
+            <a:r>
+              <a:rPr lang="az-Latn-AZ" altLang="en-US" sz="1300" b="1">
+                <a:latin typeface="Arial" panose="020B0604020202020204" pitchFamily="34" charset="0"/>
+              </a:rPr>
+              <a:t>REGİSTER</a:t>
+            </a:r>
+            <a:r>
+              <a:rPr lang="az-Latn-AZ" altLang="en-US" sz="1300">
+                <a:latin typeface="Arial" panose="020B0604020202020204" pitchFamily="34" charset="0"/>
+              </a:rPr>
+              <a:t> route -unu </a:t>
+            </a:r>
+            <a:r>
+              <a:rPr lang="az-Latn-AZ" altLang="en-US" sz="1300" b="1">
+                <a:latin typeface="Arial" panose="020B0604020202020204" pitchFamily="34" charset="0"/>
+              </a:rPr>
+              <a:t>commentə</a:t>
+            </a:r>
+            <a:r>
+              <a:rPr lang="az-Latn-AZ" altLang="en-US" sz="1300">
+                <a:latin typeface="Arial" panose="020B0604020202020204" pitchFamily="34" charset="0"/>
+              </a:rPr>
+              <a:t> alırıq.</a:t>
+            </a:r>
+            <a:endParaRPr kumimoji="0" lang="en-US" altLang="en-US" sz="1300" b="0" i="0" u="none" strike="noStrike" cap="none" normalizeH="0" baseline="0">
+              <a:ln>
+                <a:noFill/>
+              </a:ln>
+              <a:solidFill>
+                <a:schemeClr val="tx1"/>
+              </a:solidFill>
+              <a:effectLst/>
+              <a:latin typeface="Arial" panose="020B0604020202020204" pitchFamily="34" charset="0"/>
+            </a:endParaRPr>
+          </a:p>
+        </p:txBody>
+      </p:sp>
+      <p:pic>
+        <p:nvPicPr>
+          <p:cNvPr id="4" name="Picture 3">
+            <a:extLst>
+              <a:ext uri="{FF2B5EF4-FFF2-40B4-BE49-F238E27FC236}">
+                <a16:creationId xmlns:a16="http://schemas.microsoft.com/office/drawing/2014/main" id="{CB7942EF-F2A1-1A02-CBC1-986797037778}"/>
+              </a:ext>
+            </a:extLst>
+          </p:cNvPr>
+          <p:cNvPicPr>
+            <a:picLocks noChangeAspect="1"/>
+          </p:cNvPicPr>
+          <p:nvPr/>
+        </p:nvPicPr>
+        <p:blipFill>
+          <a:blip r:embed="rId2"/>
+          <a:stretch>
+            <a:fillRect/>
+          </a:stretch>
+        </p:blipFill>
+        <p:spPr>
+          <a:xfrm>
+            <a:off x="6542887" y="246727"/>
+            <a:ext cx="5649113" cy="6611273"/>
+          </a:xfrm>
+          <a:prstGeom prst="rect">
+            <a:avLst/>
+          </a:prstGeom>
+        </p:spPr>
+      </p:pic>
     </p:spTree>
     <p:extLst>
       <p:ext uri="{BB962C8B-B14F-4D97-AF65-F5344CB8AC3E}">
@@ -3483,7 +5290,7 @@
 </p:sld>
 </file>
 
-<file path=ppt/slides/slide3.xml><?xml version="1.0" encoding="utf-8"?>
+<file path=ppt/slides/slide8.xml><?xml version="1.0" encoding="utf-8"?>
 <p:sld xmlns:a="http://schemas.openxmlformats.org/drawingml/2006/main" xmlns:r="http://schemas.openxmlformats.org/officeDocument/2006/relationships" xmlns:p="http://schemas.openxmlformats.org/presentationml/2006/main">
   <p:cSld>
     <p:spTree>
@@ -3491,7 +5298,7 @@
         <p:cNvPr id="1" name="">
           <a:extLst>
             <a:ext uri="{FF2B5EF4-FFF2-40B4-BE49-F238E27FC236}">
-              <a16:creationId xmlns:a16="http://schemas.microsoft.com/office/drawing/2014/main" id="{ECE25D7D-A080-F22B-7E8D-36EC827289A1}"/>
+              <a16:creationId xmlns:a16="http://schemas.microsoft.com/office/drawing/2014/main" id="{F8ABE074-EF89-A2B0-CE7C-5B7D4757788E}"/>
             </a:ext>
           </a:extLst>
         </p:cNvPr>
@@ -3511,7 +5318,7 @@
           <p:cNvPr id="3" name="TextBox 2">
             <a:extLst>
               <a:ext uri="{FF2B5EF4-FFF2-40B4-BE49-F238E27FC236}">
-                <a16:creationId xmlns:a16="http://schemas.microsoft.com/office/drawing/2014/main" id="{E33F16A3-A6E8-401E-847B-09570DC6E4CB}"/>
+                <a16:creationId xmlns:a16="http://schemas.microsoft.com/office/drawing/2014/main" id="{BEBD6966-176D-8B19-0E47-74DC4A0CA6D8}"/>
               </a:ext>
             </a:extLst>
           </p:cNvPr>
@@ -3520,8 +5327,8 @@
         </p:nvSpPr>
         <p:spPr>
           <a:xfrm>
-            <a:off x="217714" y="255046"/>
-            <a:ext cx="11756571" cy="355354"/>
+            <a:off x="217714" y="208393"/>
+            <a:ext cx="11756571" cy="655436"/>
           </a:xfrm>
           <a:prstGeom prst="rect">
             <a:avLst/>
@@ -3541,25 +5348,312 @@
               <a:buNone/>
             </a:pPr>
             <a:r>
-              <a:rPr kumimoji="0" lang="en-US" altLang="en-US" sz="1300" b="0" i="0" u="none" strike="noStrike" cap="none" normalizeH="0" baseline="0">
-                <a:ln>
-                  <a:noFill/>
-                </a:ln>
-                <a:solidFill>
-                  <a:schemeClr val="tx1"/>
-                </a:solidFill>
-                <a:effectLst/>
-                <a:latin typeface="Arial" panose="020B0604020202020204" pitchFamily="34" charset="0"/>
-              </a:rPr>
-              <a:t>.</a:t>
-            </a:r>
-          </a:p>
-        </p:txBody>
-      </p:sp>
+              <a:rPr lang="en-US" altLang="en-US" sz="1300" b="1">
+                <a:latin typeface="Arial" panose="020B0604020202020204" pitchFamily="34" charset="0"/>
+              </a:rPr>
+              <a:t>login.blade.php </a:t>
+            </a:r>
+            <a:r>
+              <a:rPr lang="az-Latn-AZ" altLang="en-US" sz="1300">
+                <a:latin typeface="Arial" panose="020B0604020202020204" pitchFamily="34" charset="0"/>
+              </a:rPr>
+              <a:t>faylındakı </a:t>
+            </a:r>
+            <a:r>
+              <a:rPr lang="az-Latn-AZ" altLang="en-US" sz="1300" b="1">
+                <a:latin typeface="Arial" panose="020B0604020202020204" pitchFamily="34" charset="0"/>
+              </a:rPr>
+              <a:t>REGİSTER</a:t>
+            </a:r>
+            <a:r>
+              <a:rPr lang="az-Latn-AZ" altLang="en-US" sz="1300">
+                <a:latin typeface="Arial" panose="020B0604020202020204" pitchFamily="34" charset="0"/>
+              </a:rPr>
+              <a:t> üçün istifadə edilən bölməyə, `</a:t>
+            </a:r>
+            <a:r>
+              <a:rPr lang="en-US" altLang="en-US" sz="1300" b="1">
+                <a:latin typeface="Arial" panose="020B0604020202020204" pitchFamily="34" charset="0"/>
+              </a:rPr>
+              <a:t>resources\views\auth\register.blade.php</a:t>
+            </a:r>
+            <a:r>
+              <a:rPr lang="az-Latn-AZ" altLang="en-US" sz="1300">
+                <a:latin typeface="Arial" panose="020B0604020202020204" pitchFamily="34" charset="0"/>
+              </a:rPr>
+              <a:t>` faylındakı elementlərdən lazım olanları əlavə edirik.</a:t>
+            </a:r>
+            <a:endParaRPr kumimoji="0" lang="en-US" altLang="en-US" sz="1300" b="0" i="0" u="none" strike="noStrike" cap="none" normalizeH="0" baseline="0">
+              <a:ln>
+                <a:noFill/>
+              </a:ln>
+              <a:solidFill>
+                <a:schemeClr val="tx1"/>
+              </a:solidFill>
+              <a:effectLst/>
+              <a:latin typeface="Arial" panose="020B0604020202020204" pitchFamily="34" charset="0"/>
+            </a:endParaRPr>
+          </a:p>
+        </p:txBody>
+      </p:sp>
+      <p:pic>
+        <p:nvPicPr>
+          <p:cNvPr id="4" name="Picture 3">
+            <a:extLst>
+              <a:ext uri="{FF2B5EF4-FFF2-40B4-BE49-F238E27FC236}">
+                <a16:creationId xmlns:a16="http://schemas.microsoft.com/office/drawing/2014/main" id="{187A6714-C474-E0A0-C4E8-78DE462E0C8F}"/>
+              </a:ext>
+            </a:extLst>
+          </p:cNvPr>
+          <p:cNvPicPr>
+            <a:picLocks noChangeAspect="1"/>
+          </p:cNvPicPr>
+          <p:nvPr/>
+        </p:nvPicPr>
+        <p:blipFill>
+          <a:blip r:embed="rId2"/>
+          <a:stretch>
+            <a:fillRect/>
+          </a:stretch>
+        </p:blipFill>
+        <p:spPr>
+          <a:xfrm>
+            <a:off x="0" y="998833"/>
+            <a:ext cx="12192000" cy="5859167"/>
+          </a:xfrm>
+          <a:prstGeom prst="rect">
+            <a:avLst/>
+          </a:prstGeom>
+        </p:spPr>
+      </p:pic>
     </p:spTree>
     <p:extLst>
       <p:ext uri="{BB962C8B-B14F-4D97-AF65-F5344CB8AC3E}">
-        <p14:creationId xmlns:p14="http://schemas.microsoft.com/office/powerpoint/2010/main" val="3095838342"/>
+        <p14:creationId xmlns:p14="http://schemas.microsoft.com/office/powerpoint/2010/main" val="2578535579"/>
+      </p:ext>
+    </p:extLst>
+  </p:cSld>
+  <p:clrMapOvr>
+    <a:masterClrMapping/>
+  </p:clrMapOvr>
+</p:sld>
+</file>
+
+<file path=ppt/slides/slide9.xml><?xml version="1.0" encoding="utf-8"?>
+<p:sld xmlns:a="http://schemas.openxmlformats.org/drawingml/2006/main" xmlns:r="http://schemas.openxmlformats.org/officeDocument/2006/relationships" xmlns:p="http://schemas.openxmlformats.org/presentationml/2006/main">
+  <p:cSld>
+    <p:spTree>
+      <p:nvGrpSpPr>
+        <p:cNvPr id="1" name="">
+          <a:extLst>
+            <a:ext uri="{FF2B5EF4-FFF2-40B4-BE49-F238E27FC236}">
+              <a16:creationId xmlns:a16="http://schemas.microsoft.com/office/drawing/2014/main" id="{0789E785-C826-5F88-5D05-DFB14D043A59}"/>
+            </a:ext>
+          </a:extLst>
+        </p:cNvPr>
+        <p:cNvGrpSpPr/>
+        <p:nvPr/>
+      </p:nvGrpSpPr>
+      <p:grpSpPr>
+        <a:xfrm>
+          <a:off x="0" y="0"/>
+          <a:ext cx="0" cy="0"/>
+          <a:chOff x="0" y="0"/>
+          <a:chExt cx="0" cy="0"/>
+        </a:xfrm>
+      </p:grpSpPr>
+      <p:sp>
+        <p:nvSpPr>
+          <p:cNvPr id="3" name="TextBox 2">
+            <a:extLst>
+              <a:ext uri="{FF2B5EF4-FFF2-40B4-BE49-F238E27FC236}">
+                <a16:creationId xmlns:a16="http://schemas.microsoft.com/office/drawing/2014/main" id="{7150ED0A-02CD-A25A-EF68-3228EAA05CC0}"/>
+              </a:ext>
+            </a:extLst>
+          </p:cNvPr>
+          <p:cNvSpPr txBox="1"/>
+          <p:nvPr/>
+        </p:nvSpPr>
+        <p:spPr>
+          <a:xfrm>
+            <a:off x="217714" y="115087"/>
+            <a:ext cx="11756571" cy="655436"/>
+          </a:xfrm>
+          <a:prstGeom prst="rect">
+            <a:avLst/>
+          </a:prstGeom>
+          <a:noFill/>
+        </p:spPr>
+        <p:txBody>
+          <a:bodyPr wrap="square">
+            <a:spAutoFit/>
+          </a:bodyPr>
+          <a:lstStyle/>
+          <a:p>
+            <a:pPr>
+              <a:lnSpc>
+                <a:spcPct val="150000"/>
+              </a:lnSpc>
+              <a:buNone/>
+            </a:pPr>
+            <a:r>
+              <a:rPr lang="en-US" altLang="en-US" sz="1300" b="1">
+                <a:latin typeface="Arial" panose="020B0604020202020204" pitchFamily="34" charset="0"/>
+              </a:rPr>
+              <a:t>LOGIN</a:t>
+            </a:r>
+            <a:r>
+              <a:rPr lang="en-US" altLang="en-US" sz="1300">
+                <a:latin typeface="Arial" panose="020B0604020202020204" pitchFamily="34" charset="0"/>
+              </a:rPr>
+              <a:t> s</a:t>
+            </a:r>
+            <a:r>
+              <a:rPr lang="az-Latn-AZ" altLang="en-US" sz="1300">
+                <a:latin typeface="Arial" panose="020B0604020202020204" pitchFamily="34" charset="0"/>
+              </a:rPr>
+              <a:t>özünə kliklədikdə `</a:t>
+            </a:r>
+            <a:r>
+              <a:rPr lang="az-Latn-AZ" altLang="en-US" sz="1300" b="1">
+                <a:latin typeface="Arial" panose="020B0604020202020204" pitchFamily="34" charset="0"/>
+              </a:rPr>
+              <a:t>http://vendor-e-commerce.test/login</a:t>
+            </a:r>
+            <a:r>
+              <a:rPr lang="az-Latn-AZ" altLang="en-US" sz="1300">
+                <a:latin typeface="Arial" panose="020B0604020202020204" pitchFamily="34" charset="0"/>
+              </a:rPr>
+              <a:t>` səhifəsinə getməsi üçün</a:t>
+            </a:r>
+            <a:r>
+              <a:rPr lang="en-US" altLang="en-US" sz="1300">
+                <a:latin typeface="Arial" panose="020B0604020202020204" pitchFamily="34" charset="0"/>
+              </a:rPr>
+              <a:t> `</a:t>
+            </a:r>
+            <a:r>
+              <a:rPr lang="en-US" altLang="en-US" sz="1300" b="1">
+                <a:latin typeface="Arial" panose="020B0604020202020204" pitchFamily="34" charset="0"/>
+              </a:rPr>
+              <a:t>resources\views\frontend\layouts\menu.blade.php</a:t>
+            </a:r>
+            <a:r>
+              <a:rPr lang="en-US" altLang="en-US" sz="1300">
+                <a:latin typeface="Arial" panose="020B0604020202020204" pitchFamily="34" charset="0"/>
+              </a:rPr>
+              <a:t>` </a:t>
+            </a:r>
+            <a:r>
+              <a:rPr lang="az-Latn-AZ" altLang="en-US" sz="1300">
+                <a:latin typeface="Arial" panose="020B0604020202020204" pitchFamily="34" charset="0"/>
+              </a:rPr>
+              <a:t>faylına </a:t>
+            </a:r>
+            <a:r>
+              <a:rPr lang="az-Latn-AZ" altLang="en-US" sz="1300" b="1">
+                <a:latin typeface="Arial" panose="020B0604020202020204" pitchFamily="34" charset="0"/>
+              </a:rPr>
+              <a:t>route</a:t>
+            </a:r>
+            <a:r>
+              <a:rPr lang="az-Latn-AZ" altLang="en-US" sz="1300">
+                <a:latin typeface="Arial" panose="020B0604020202020204" pitchFamily="34" charset="0"/>
+              </a:rPr>
+              <a:t> əlavə edirik.</a:t>
+            </a:r>
+            <a:endParaRPr kumimoji="0" lang="en-US" altLang="en-US" sz="1300" b="0" i="0" u="none" strike="noStrike" cap="none" normalizeH="0" baseline="0">
+              <a:ln>
+                <a:noFill/>
+              </a:ln>
+              <a:solidFill>
+                <a:schemeClr val="tx1"/>
+              </a:solidFill>
+              <a:effectLst/>
+              <a:latin typeface="Arial" panose="020B0604020202020204" pitchFamily="34" charset="0"/>
+            </a:endParaRPr>
+          </a:p>
+        </p:txBody>
+      </p:sp>
+      <p:pic>
+        <p:nvPicPr>
+          <p:cNvPr id="4" name="Picture 3">
+            <a:extLst>
+              <a:ext uri="{FF2B5EF4-FFF2-40B4-BE49-F238E27FC236}">
+                <a16:creationId xmlns:a16="http://schemas.microsoft.com/office/drawing/2014/main" id="{57672D3D-2BC0-E6E9-3CCF-2DA2619D10C9}"/>
+              </a:ext>
+            </a:extLst>
+          </p:cNvPr>
+          <p:cNvPicPr>
+            <a:picLocks noChangeAspect="1"/>
+          </p:cNvPicPr>
+          <p:nvPr/>
+        </p:nvPicPr>
+        <p:blipFill>
+          <a:blip r:embed="rId2"/>
+          <a:srcRect b="44674"/>
+          <a:stretch>
+            <a:fillRect/>
+          </a:stretch>
+        </p:blipFill>
+        <p:spPr>
+          <a:xfrm>
+            <a:off x="0" y="871657"/>
+            <a:ext cx="12192000" cy="1694261"/>
+          </a:xfrm>
+          <a:prstGeom prst="rect">
+            <a:avLst/>
+          </a:prstGeom>
+          <a:ln w="38100" cap="sq">
+            <a:solidFill>
+              <a:srgbClr val="000000"/>
+            </a:solidFill>
+            <a:prstDash val="solid"/>
+            <a:miter lim="800000"/>
+          </a:ln>
+          <a:effectLst>
+            <a:outerShdw blurRad="50800" dist="38100" dir="2700000" algn="tl" rotWithShape="0">
+              <a:srgbClr val="000000">
+                <a:alpha val="43000"/>
+              </a:srgbClr>
+            </a:outerShdw>
+          </a:effectLst>
+        </p:spPr>
+      </p:pic>
+      <p:pic>
+        <p:nvPicPr>
+          <p:cNvPr id="6" name="Picture 5">
+            <a:extLst>
+              <a:ext uri="{FF2B5EF4-FFF2-40B4-BE49-F238E27FC236}">
+                <a16:creationId xmlns:a16="http://schemas.microsoft.com/office/drawing/2014/main" id="{DABD8FD2-1856-4EC9-1329-DFE08BC3BF37}"/>
+              </a:ext>
+            </a:extLst>
+          </p:cNvPr>
+          <p:cNvPicPr>
+            <a:picLocks noChangeAspect="1"/>
+          </p:cNvPicPr>
+          <p:nvPr/>
+        </p:nvPicPr>
+        <p:blipFill>
+          <a:blip r:embed="rId3"/>
+          <a:stretch>
+            <a:fillRect/>
+          </a:stretch>
+        </p:blipFill>
+        <p:spPr>
+          <a:xfrm>
+            <a:off x="7716416" y="2990516"/>
+            <a:ext cx="4475584" cy="3881480"/>
+          </a:xfrm>
+          <a:prstGeom prst="rect">
+            <a:avLst/>
+          </a:prstGeom>
+        </p:spPr>
+      </p:pic>
+    </p:spTree>
+    <p:extLst>
+      <p:ext uri="{BB962C8B-B14F-4D97-AF65-F5344CB8AC3E}">
+        <p14:creationId xmlns:p14="http://schemas.microsoft.com/office/powerpoint/2010/main" val="3276578352"/>
       </p:ext>
     </p:extLst>
   </p:cSld>
